--- a/00_plataforma_y_delta_lake/00_plataforma_y_delta_lake.pptx
+++ b/00_plataforma_y_delta_lake/00_plataforma_y_delta_lake.pptx
@@ -4,6 +4,9 @@
   <p:sldMasterIdLst>
     <p:sldMasterId id="2147483648" r:id="rId1"/>
   </p:sldMasterIdLst>
+  <p:notesMasterIdLst>
+    <p:notesMasterId r:id="rId17"/>
+  </p:notesMasterIdLst>
   <p:sldIdLst>
     <p:sldId id="256" r:id="rId2"/>
     <p:sldId id="257" r:id="rId3"/>
@@ -21,9 +24,6 @@
     <p:sldId id="269" r:id="rId15"/>
     <p:sldId id="270" r:id="rId16"/>
   </p:sldIdLst>
-  <p:notesMasterIdLst>
-    <p:notesMasterId r:id="rId17"/>
-  </p:notesMasterIdLst>
   <p:sldSz cx="12192000" cy="6858000"/>
   <p:notesSz cx="6858000" cy="12192000"/>
   <p:defaultTextStyle>
@@ -121,13 +121,13 @@
   <p:extLst>
     <p:ext uri="{521415D9-36F7-43E2-AB2F-B90AF26B5E84}">
       <p14:sectionLst xmlns:p14="http://schemas.microsoft.com/office/powerpoint/2010/main">
-        <p14:section name="Inicio" id="{6efbfec1-dcd4-ef75-4d76-1b3debfd0bd9}">
+        <p14:section name="Inicio" id="{6EFBFEC1-DCD4-EF75-4D76-1B3DEBFD0BD9}">
           <p14:sldIdLst>
             <p14:sldId id="256"/>
             <p14:sldId id="257"/>
           </p14:sldIdLst>
         </p14:section>
-        <p14:section name="Recorrido" id="{c1ff71f3-48c9-4e7c-cf72-69cf13318c87}">
+        <p14:section name="Recorrido" id="{C1FF71F3-48C9-4E7C-CF72-69CF13318C87}">
           <p14:sldIdLst>
             <p14:sldId id="258"/>
             <p14:sldId id="259"/>
@@ -135,7 +135,7 @@
             <p14:sldId id="261"/>
           </p14:sldIdLst>
         </p14:section>
-        <p14:section name="Delta Lake" id="{fe0379e5-b223-05f1-e2af-0a6dae995a4a}">
+        <p14:section name="Delta Lake" id="{FE0379E5-B223-05F1-E2AF-0A6DAE995A4A}">
           <p14:sldIdLst>
             <p14:sldId id="262"/>
             <p14:sldId id="263"/>
@@ -146,7 +146,7 @@
             <p14:sldId id="268"/>
           </p14:sldIdLst>
         </p14:section>
-        <p14:section name="Cierre" id="{6a40c4c6-11f7-2eb0-63db-02090a042f7d}">
+        <p14:section name="Cierre" id="{6A40C4C6-11F7-2EB0-63DB-02090A042F7D}">
           <p14:sldIdLst>
             <p14:sldId id="269"/>
             <p14:sldId id="270"/>
@@ -183,234 +183,10 @@
           <a:chExt cx="0" cy="0"/>
         </a:xfrm>
       </p:grpSpPr>
-      <p:sp>
-        <p:nvSpPr>
-          <p:cNvPr id="2" name="Header Placeholder 1"/>
-          <p:cNvSpPr>
-            <a:spLocks noGrp="1"/>
-          </p:cNvSpPr>
-          <p:nvPr>
-            <p:ph type="hdr" sz="quarter"/>
-          </p:nvPr>
-        </p:nvSpPr>
-        <p:spPr>
-          <a:xfrm>
-            <a:off x="0" y="0"/>
-            <a:ext cx="2971800" cy="458788"/>
-          </a:xfrm>
-          <a:prstGeom prst="rect">
-            <a:avLst/>
-          </a:prstGeom>
-        </p:spPr>
-        <p:txBody>
-          <a:bodyPr vert="horz" lIns="91440" tIns="45720" rIns="91440" bIns="45720" rtlCol="0"/>
-          <a:lstStyle>
-            <a:lvl1pPr algn="l">
-              <a:defRPr sz="1200"/>
-            </a:lvl1pPr>
-          </a:lstStyle>
-          <a:p>
-            <a:endParaRPr lang="en-US"/>
-          </a:p>
-        </p:txBody>
-      </p:sp>
-      <p:sp>
-        <p:nvSpPr>
-          <p:cNvPr id="3" name="Date Placeholder 2"/>
-          <p:cNvSpPr>
-            <a:spLocks noGrp="1"/>
-          </p:cNvSpPr>
-          <p:nvPr>
-            <p:ph type="dt" idx="1"/>
-          </p:nvPr>
-        </p:nvSpPr>
-        <p:spPr>
-          <a:xfrm>
-            <a:off x="3884613" y="0"/>
-            <a:ext cx="2971800" cy="458788"/>
-          </a:xfrm>
-          <a:prstGeom prst="rect">
-            <a:avLst/>
-          </a:prstGeom>
-        </p:spPr>
-        <p:txBody>
-          <a:bodyPr vert="horz" lIns="91440" tIns="45720" rIns="91440" bIns="45720" rtlCol="0"/>
-          <a:lstStyle>
-            <a:lvl1pPr algn="r">
-              <a:defRPr sz="1200"/>
-            </a:lvl1pPr>
-          </a:lstStyle>
-          <a:p>
-            <a:fld id="{5282F153-3F37-0F45-9E97-73ACFA13230C}" type="datetimeFigureOut">
-              <a:rPr lang="en-US"/>
-              <a:t>7/23/19</a:t>
-            </a:fld>
-            <a:endParaRPr lang="en-US"/>
-          </a:p>
-        </p:txBody>
-      </p:sp>
-      <p:sp>
-        <p:nvSpPr>
-          <p:cNvPr id="4" name="Slide Image Placeholder 3"/>
-          <p:cNvSpPr>
-            <a:spLocks noGrp="1" noRot="1" noChangeAspect="1"/>
-          </p:cNvSpPr>
-          <p:nvPr>
-            <p:ph type="sldImg" idx="2"/>
-          </p:nvPr>
-        </p:nvSpPr>
-        <p:spPr>
-          <a:xfrm>
-            <a:off x="685800" y="1143000"/>
-            <a:ext cx="5486400" cy="3086100"/>
-          </a:xfrm>
-          <a:prstGeom prst="rect">
-            <a:avLst/>
-          </a:prstGeom>
-          <a:noFill/>
-          <a:ln w="12700">
-            <a:solidFill>
-              <a:prstClr val="black"/>
-            </a:solidFill>
-          </a:ln>
-        </p:spPr>
-        <p:txBody>
-          <a:bodyPr vert="horz" lIns="91440" tIns="45720" rIns="91440" bIns="45720" rtlCol="0" anchor="ctr"/>
-          <a:lstStyle/>
-          <a:p>
-            <a:endParaRPr lang="en-US"/>
-          </a:p>
-        </p:txBody>
-      </p:sp>
-      <p:sp>
-        <p:nvSpPr>
-          <p:cNvPr id="5" name="Notes Placeholder 4"/>
-          <p:cNvSpPr>
-            <a:spLocks noGrp="1"/>
-          </p:cNvSpPr>
-          <p:nvPr>
-            <p:ph type="body" sz="quarter" idx="3"/>
-          </p:nvPr>
-        </p:nvSpPr>
-        <p:spPr>
-          <a:xfrm>
-            <a:off x="685800" y="4400550"/>
-            <a:ext cx="5486400" cy="3600450"/>
-          </a:xfrm>
-          <a:prstGeom prst="rect">
-            <a:avLst/>
-          </a:prstGeom>
-        </p:spPr>
-        <p:txBody>
-          <a:bodyPr vert="horz" lIns="91440" tIns="45720" rIns="91440" bIns="45720" rtlCol="0"/>
-          <a:lstStyle/>
-          <a:p>
-            <a:pPr lvl="0"/>
-            <a:r>
-              <a:rPr lang="en-US"/>
-              <a:t>Click to edit Master text styles</a:t>
-            </a:r>
-          </a:p>
-          <a:p>
-            <a:pPr lvl="1"/>
-            <a:r>
-              <a:rPr lang="en-US"/>
-              <a:t>Second level</a:t>
-            </a:r>
-          </a:p>
-          <a:p>
-            <a:pPr lvl="2"/>
-            <a:r>
-              <a:rPr lang="en-US"/>
-              <a:t>Third level</a:t>
-            </a:r>
-          </a:p>
-          <a:p>
-            <a:pPr lvl="3"/>
-            <a:r>
-              <a:rPr lang="en-US"/>
-              <a:t>Fourth level</a:t>
-            </a:r>
-          </a:p>
-          <a:p>
-            <a:pPr lvl="4"/>
-            <a:r>
-              <a:rPr lang="en-US"/>
-              <a:t>Fifth level</a:t>
-            </a:r>
-          </a:p>
-        </p:txBody>
-      </p:sp>
-      <p:sp>
-        <p:nvSpPr>
-          <p:cNvPr id="6" name="Footer Placeholder 5"/>
-          <p:cNvSpPr>
-            <a:spLocks noGrp="1"/>
-          </p:cNvSpPr>
-          <p:nvPr>
-            <p:ph type="ftr" sz="quarter" idx="4"/>
-          </p:nvPr>
-        </p:nvSpPr>
-        <p:spPr>
-          <a:xfrm>
-            <a:off x="0" y="8685213"/>
-            <a:ext cx="2971800" cy="458787"/>
-          </a:xfrm>
-          <a:prstGeom prst="rect">
-            <a:avLst/>
-          </a:prstGeom>
-        </p:spPr>
-        <p:txBody>
-          <a:bodyPr vert="horz" lIns="91440" tIns="45720" rIns="91440" bIns="45720" rtlCol="0" anchor="b"/>
-          <a:lstStyle>
-            <a:lvl1pPr algn="l">
-              <a:defRPr sz="1200"/>
-            </a:lvl1pPr>
-          </a:lstStyle>
-          <a:p>
-            <a:endParaRPr lang="en-US"/>
-          </a:p>
-        </p:txBody>
-      </p:sp>
-      <p:sp>
-        <p:nvSpPr>
-          <p:cNvPr id="7" name="Slide Number Placeholder 6"/>
-          <p:cNvSpPr>
-            <a:spLocks noGrp="1"/>
-          </p:cNvSpPr>
-          <p:nvPr>
-            <p:ph type="sldNum" sz="quarter" idx="5"/>
-          </p:nvPr>
-        </p:nvSpPr>
-        <p:spPr>
-          <a:xfrm>
-            <a:off x="3884613" y="8685213"/>
-            <a:ext cx="2971800" cy="458787"/>
-          </a:xfrm>
-          <a:prstGeom prst="rect">
-            <a:avLst/>
-          </a:prstGeom>
-        </p:spPr>
-        <p:txBody>
-          <a:bodyPr vert="horz" lIns="91440" tIns="45720" rIns="91440" bIns="45720" rtlCol="0" anchor="b"/>
-          <a:lstStyle>
-            <a:lvl1pPr algn="r">
-              <a:defRPr sz="1200"/>
-            </a:lvl1pPr>
-          </a:lstStyle>
-          <a:p>
-            <a:fld id="{CE5E9CC1-C706-0F49-92D6-E571CC5EEA8F}" type="slidenum">
-              <a:rPr lang="en-US"/>
-              <a:t>‹#›</a:t>
-            </a:fld>
-            <a:endParaRPr lang="en-US"/>
-          </a:p>
-        </p:txBody>
-      </p:sp>
     </p:spTree>
     <p:extLst>
       <p:ext uri="{BB962C8B-B14F-4D97-AF65-F5344CB8AC3E}">
-        <p14:creationId xmlns:p14="http://schemas.microsoft.com/office/powerpoint/2010/main" val="1024086991"/>
+        <p14:creationId xmlns:p14="http://schemas.microsoft.com/office/powerpoint/2010/main" val="789045657"/>
       </p:ext>
     </p:extLst>
   </p:cSld>
@@ -558,7 +334,6 @@
               <a:rPr lang="en-US" dirty="0"/>
               <a:t>Bienvenida. Este laboratorio es la base de todo lo que sigue: antes de ingerir datos hay que entender dónde quedan guardados. La sección 1 pesa poco en el examen, pero sin ella no se entiende ninguna otra.</a:t>
             </a:r>
-            <a:endParaRPr lang="en-US" dirty="0"/>
           </a:p>
         </p:txBody>
       </p:sp>
@@ -646,7 +421,6 @@
               <a:rPr lang="en-US" dirty="0"/>
               <a:t>Esta es la secuencia exacta que hace el notebook en la sección 1. Pide que miren operationMetrics de la versión 3: muestra cuántas filas se eliminaron.</a:t>
             </a:r>
-            <a:endParaRPr lang="en-US" dirty="0"/>
           </a:p>
         </p:txBody>
       </p:sp>
@@ -734,7 +508,6 @@
               <a:rPr lang="en-US" dirty="0"/>
               <a:t>En el notebook simulamos un accidente: un DELETE sin WHERE. Con RESTORE volvemos a la última versión buena. VACUUM se ve en detalle en la Lección 6.</a:t>
             </a:r>
-            <a:endParaRPr lang="en-US" dirty="0"/>
           </a:p>
         </p:txBody>
       </p:sp>
@@ -822,7 +595,6 @@
               <a:rPr lang="en-US" dirty="0"/>
               <a:t>Un UPDATE genera dos filas: preimage y postimage. Además vienen _commit_version y _commit_timestamp. Es la base para propagar cambios de bronze a silver sin releer toda la tabla.</a:t>
             </a:r>
-            <a:endParaRPr lang="en-US" dirty="0"/>
           </a:p>
         </p:txBody>
       </p:sp>
@@ -910,7 +682,6 @@
               <a:rPr lang="en-US" dirty="0"/>
               <a:t>Esta es la única parte del laboratorio en Python. Explica línea por línea: write es la escritura, mode append agrega filas, option mergeSchema permite columnas nuevas y saveAsTable escribe en la tabla.</a:t>
             </a:r>
-            <a:endParaRPr lang="en-US" dirty="0"/>
           </a:p>
         </p:txBody>
       </p:sp>
@@ -998,7 +769,6 @@
               <a:rPr lang="en-US" dirty="0"/>
               <a:t>Resumen para el examen. El Cuestionario 1 evalúa exactamente estos seis temas.</a:t>
             </a:r>
-            <a:endParaRPr lang="en-US" dirty="0"/>
           </a:p>
         </p:txBody>
       </p:sp>
@@ -1086,7 +856,6 @@
               <a:rPr lang="en-US" dirty="0"/>
               <a:t>Cierre. Si alguna celda falla, que copien el mensaje de error en su entrega del laboratorio.</a:t>
             </a:r>
-            <a:endParaRPr lang="en-US" dirty="0"/>
           </a:p>
         </p:txBody>
       </p:sp>
@@ -1174,7 +943,6 @@
               <a:rPr lang="en-US" dirty="0"/>
               <a:t>Cinco bloques. Al final de cada uno hay un resumen de lo que suele preguntar el examen. El laboratorio se hace en Databricks Free Edition con datos ficticios generados en el notebook.</a:t>
             </a:r>
-            <a:endParaRPr lang="en-US" dirty="0"/>
           </a:p>
         </p:txBody>
       </p:sp>
@@ -1258,10 +1026,6 @@
           <a:bodyPr/>
           <a:lstStyle/>
           <a:p>
-            <a:r>
-              <a:rPr lang="en-US" dirty="0"/>
-              <a:t/>
-            </a:r>
             <a:endParaRPr lang="en-US" dirty="0"/>
           </a:p>
         </p:txBody>
@@ -1350,7 +1114,6 @@
               <a:rPr lang="en-US" dirty="0"/>
               <a:t>Muestra cada sección en vivo. Lo más importante para hoy: Workspace, para abrir el notebook desde el Git folder, y Catalog, para ver las tablas que vamos a crear.</a:t>
             </a:r>
-            <a:endParaRPr lang="en-US" dirty="0"/>
           </a:p>
         </p:txBody>
       </p:sp>
@@ -1438,7 +1201,6 @@
               <a:rPr lang="en-US" dirty="0"/>
               <a:t>Pregunta típica de examen: qué compute conviene para un proceso nocturno (job compute o serverless) y cuál para un dashboard (SQL warehouse). En Free Edition solo hay serverless, pero el examen pregunta por todos.</a:t>
             </a:r>
-            <a:endParaRPr lang="en-US" dirty="0"/>
           </a:p>
         </p:txBody>
       </p:sp>
@@ -1526,7 +1288,6 @@
               <a:rPr lang="en-US" dirty="0"/>
               <a:t>La jerarquía de Unity Catalog. El metastore está por encima y puede asignarse a varios workspaces de la misma región: así comparten los mismos datos y permisos. La gobernanza en detalle se ve en la Lección 2.</a:t>
             </a:r>
-            <a:endParaRPr lang="en-US" dirty="0"/>
           </a:p>
         </p:txBody>
       </p:sp>
@@ -1610,10 +1371,6 @@
           <a:bodyPr/>
           <a:lstStyle/>
           <a:p>
-            <a:r>
-              <a:rPr lang="en-US" dirty="0"/>
-              <a:t/>
-            </a:r>
             <a:endParaRPr lang="en-US" dirty="0"/>
           </a:p>
         </p:txBody>
@@ -1702,7 +1459,6 @@
               <a:rPr lang="en-US" dirty="0"/>
               <a:t>Pregunta del Cuestionario 0: qué es un lakehouse. La clave es que los datos están en archivos abiertos (Parquet) pero con las garantías de un warehouse gracias a Delta Lake.</a:t>
             </a:r>
-            <a:endParaRPr lang="en-US" dirty="0"/>
           </a:p>
         </p:txBody>
       </p:sp>
@@ -1790,7 +1546,6 @@
               <a:rPr lang="en-US" dirty="0"/>
               <a:t>El registro de transacciones es lo que da las garantías ACID: una escritura queda completa en el log o no existe. También guarda estadísticas por archivo (mínimos y máximos), que permiten saltarse archivos al consultar: data skipping.</a:t>
             </a:r>
-            <a:endParaRPr lang="en-US" dirty="0"/>
           </a:p>
         </p:txBody>
       </p:sp>
@@ -1868,6 +1623,7 @@
         <a:solidFill>
           <a:schemeClr val="tx2"/>
         </a:solidFill>
+        <a:effectLst/>
       </p:bgPr>
     </p:bg>
     <p:spTree>
@@ -1887,9 +1643,11 @@
       <p:sp>
         <p:nvSpPr>
           <p:cNvPr id="2" name="Text 0"/>
-          <p:cNvSpPr/>
+          <p:cNvSpPr>
+            <a:spLocks noGrp="1"/>
+          </p:cNvSpPr>
           <p:nvPr>
-            <p:ph idx="100" type="title" hasCustomPrompt="1"/>
+            <p:ph type="title" idx="100" hasCustomPrompt="1"/>
           </p:nvPr>
         </p:nvSpPr>
         <p:spPr>
@@ -1906,7 +1664,7 @@
         <p:txBody>
           <a:bodyPr wrap="square" rtlCol="0"/>
           <a:lstStyle>
-            <a:lvl1pPr algn="l" indent="0" marL="0">
+            <a:lvl1pPr marL="0" indent="0" algn="l">
               <a:buNone/>
               <a:defRPr lang="en-US" sz="4400" b="1" dirty="0">
                 <a:solidFill>
@@ -1916,7 +1674,7 @@
             </a:lvl1pPr>
           </a:lstStyle>
           <a:p>
-            <a:pPr algn="l" indent="0" marL="0">
+            <a:pPr marL="0" indent="0" algn="l">
               <a:buNone/>
             </a:pPr>
             <a:endParaRPr lang="en-US" sz="4400" dirty="0"/>
@@ -1926,9 +1684,11 @@
       <p:sp>
         <p:nvSpPr>
           <p:cNvPr id="3" name="Text 0"/>
-          <p:cNvSpPr/>
+          <p:cNvSpPr>
+            <a:spLocks noGrp="1"/>
+          </p:cNvSpPr>
           <p:nvPr>
-            <p:ph idx="101" type="body" hasCustomPrompt="1"/>
+            <p:ph type="body" idx="101" hasCustomPrompt="1"/>
           </p:nvPr>
         </p:nvSpPr>
         <p:spPr>
@@ -1945,7 +1705,7 @@
         <p:txBody>
           <a:bodyPr wrap="square" rtlCol="0"/>
           <a:lstStyle>
-            <a:lvl1pPr indent="0" marL="0">
+            <a:lvl1pPr marL="0" indent="0">
               <a:buNone/>
               <a:defRPr lang="en-US" sz="1800" dirty="0">
                 <a:solidFill>
@@ -1955,7 +1715,7 @@
             </a:lvl1pPr>
           </a:lstStyle>
           <a:p>
-            <a:pPr indent="0" marL="0">
+            <a:pPr marL="0" indent="0">
               <a:buNone/>
             </a:pPr>
             <a:endParaRPr lang="en-US" sz="1800" dirty="0"/>
@@ -1978,6 +1738,7 @@
         <a:solidFill>
           <a:schemeClr val="tx2"/>
         </a:solidFill>
+        <a:effectLst/>
       </p:bgPr>
     </p:bg>
     <p:spTree>
@@ -1997,9 +1758,11 @@
       <p:sp>
         <p:nvSpPr>
           <p:cNvPr id="2" name="Text 0"/>
-          <p:cNvSpPr/>
+          <p:cNvSpPr>
+            <a:spLocks noGrp="1"/>
+          </p:cNvSpPr>
           <p:nvPr>
-            <p:ph idx="100" type="title" hasCustomPrompt="1"/>
+            <p:ph type="title" idx="100" hasCustomPrompt="1"/>
           </p:nvPr>
         </p:nvSpPr>
         <p:spPr>
@@ -2016,7 +1779,7 @@
         <p:txBody>
           <a:bodyPr wrap="square" rtlCol="0"/>
           <a:lstStyle>
-            <a:lvl1pPr algn="l" indent="0" marL="0">
+            <a:lvl1pPr marL="0" indent="0" algn="l">
               <a:buNone/>
               <a:defRPr lang="en-US" sz="4000" b="1" dirty="0">
                 <a:solidFill>
@@ -2026,7 +1789,7 @@
             </a:lvl1pPr>
           </a:lstStyle>
           <a:p>
-            <a:pPr algn="l" indent="0" marL="0">
+            <a:pPr marL="0" indent="0" algn="l">
               <a:buNone/>
             </a:pPr>
             <a:endParaRPr lang="en-US" sz="4000" dirty="0"/>
@@ -2036,9 +1799,11 @@
       <p:sp>
         <p:nvSpPr>
           <p:cNvPr id="3" name="Text 0"/>
-          <p:cNvSpPr/>
+          <p:cNvSpPr>
+            <a:spLocks noGrp="1"/>
+          </p:cNvSpPr>
           <p:nvPr>
-            <p:ph idx="101" type="body" hasCustomPrompt="1"/>
+            <p:ph type="body" idx="101" hasCustomPrompt="1"/>
           </p:nvPr>
         </p:nvSpPr>
         <p:spPr>
@@ -2055,7 +1820,7 @@
         <p:txBody>
           <a:bodyPr wrap="square" rtlCol="0"/>
           <a:lstStyle>
-            <a:lvl1pPr indent="0" marL="0">
+            <a:lvl1pPr marL="0" indent="0">
               <a:buNone/>
               <a:defRPr lang="en-US" sz="1800" dirty="0">
                 <a:solidFill>
@@ -2065,7 +1830,7 @@
             </a:lvl1pPr>
           </a:lstStyle>
           <a:p>
-            <a:pPr indent="0" marL="0">
+            <a:pPr marL="0" indent="0">
               <a:buNone/>
             </a:pPr>
             <a:endParaRPr lang="en-US" sz="1800" dirty="0"/>
@@ -2088,6 +1853,7 @@
         <a:solidFill>
           <a:schemeClr val="bg1"/>
         </a:solidFill>
+        <a:effectLst/>
       </p:bgPr>
     </p:bg>
     <p:spTree>
@@ -2125,7 +1891,7 @@
           <a:bodyPr wrap="square" lIns="0" tIns="0" rIns="0" bIns="0" rtlCol="0" anchor="ctr"/>
           <a:lstStyle/>
           <a:p>
-            <a:pPr indent="0" marL="0">
+            <a:pPr marL="0" indent="0">
               <a:buNone/>
             </a:pPr>
             <a:r>
@@ -2143,9 +1909,11 @@
       <p:sp>
         <p:nvSpPr>
           <p:cNvPr id="3" name="Text 1"/>
-          <p:cNvSpPr/>
+          <p:cNvSpPr>
+            <a:spLocks noGrp="1"/>
+          </p:cNvSpPr>
           <p:nvPr>
-            <p:ph idx="101" type="title" hasCustomPrompt="1"/>
+            <p:ph type="title" idx="101" hasCustomPrompt="1"/>
           </p:nvPr>
         </p:nvSpPr>
         <p:spPr>
@@ -2162,7 +1930,7 @@
         <p:txBody>
           <a:bodyPr wrap="square" rtlCol="0"/>
           <a:lstStyle>
-            <a:lvl1pPr algn="l" indent="0" marL="0">
+            <a:lvl1pPr marL="0" indent="0" algn="l">
               <a:buNone/>
               <a:defRPr lang="en-US" sz="3000" b="1" dirty="0">
                 <a:solidFill>
@@ -2172,7 +1940,7 @@
             </a:lvl1pPr>
           </a:lstStyle>
           <a:p>
-            <a:pPr algn="l" indent="0" marL="0">
+            <a:pPr marL="0" indent="0" algn="l">
               <a:buNone/>
             </a:pPr>
             <a:endParaRPr lang="en-US" sz="3000" dirty="0"/>
@@ -2199,7 +1967,7 @@
           </a:prstGeom>
           <a:extLst>
             <a:ext uri="{C572A759-6A51-4108-AA02-DFA0A04FC94B}">
-              <ma14:wrappingTextBoxFlag xmlns:ma14="http://schemas.microsoft.com/office/mac/drawingml/2011/main" val="0"/>
+              <ma14:wrappingTextBoxFlag xmlns:ma14="http://schemas.microsoft.com/office/mac/drawingml/2011/main" xmlns="" val="0"/>
             </a:ext>
           </a:extLst>
         </p:spPr>
@@ -2217,8 +1985,8 @@
           <a:p>
             <a:pPr algn="r"/>
             <a:fld id="{F7021451-1387-4CA6-816F-3879F97B5CBC}" type="slidenum">
-              <a:rPr b="0" lang="en-US"/>
-              <a:t>1004</a:t>
+              <a:rPr lang="en-US" b="0"/>
+              <a:t>‹Nº›</a:t>
             </a:fld>
             <a:endParaRPr lang="en-US"/>
           </a:p>
@@ -2235,6 +2003,11 @@
 <file path=ppt/slideMasters/slideMaster1.xml><?xml version="1.0" encoding="utf-8"?>
 <p:sldMaster xmlns:a="http://schemas.openxmlformats.org/drawingml/2006/main" xmlns:r="http://schemas.openxmlformats.org/officeDocument/2006/relationships" xmlns:p="http://schemas.openxmlformats.org/presentationml/2006/main">
   <p:cSld>
+    <p:bg>
+      <p:bgRef idx="1001">
+        <a:schemeClr val="bg1"/>
+      </p:bgRef>
+    </p:bg>
     <p:spTree>
       <p:nvGrpSpPr>
         <p:cNvPr id="1" name=""/>
@@ -2269,7 +2042,7 @@
           </a:prstGeom>
           <a:extLst>
             <a:ext uri="{C572A759-6A51-4108-AA02-DFA0A04FC94B}">
-              <ma14:wrappingTextBoxFlag xmlns:ma14="http://schemas.microsoft.com/office/mac/drawingml/2011/main" val="0"/>
+              <ma14:wrappingTextBoxFlag xmlns:ma14="http://schemas.microsoft.com/office/mac/drawingml/2011/main" xmlns="" val="0"/>
             </a:ext>
           </a:extLst>
         </p:spPr>
@@ -2287,8 +2060,8 @@
           <a:p>
             <a:pPr algn="r"/>
             <a:fld id="{F7021451-1387-4CA6-816F-3879F97B5CBC}" type="slidenum">
-              <a:rPr b="0" lang="en-US"/>
-              <a:t>null</a:t>
+              <a:rPr lang="en-US" b="0"/>
+              <a:t>‹Nº›</a:t>
             </a:fld>
             <a:endParaRPr lang="en-US"/>
           </a:p>
@@ -2595,11 +2368,11 @@
           <a:bodyPr wrap="square" lIns="0" tIns="0" rIns="0" bIns="0" rtlCol="0" anchor="t"/>
           <a:lstStyle/>
           <a:p>
-            <a:pPr indent="0" marL="0">
-              <a:buNone/>
-            </a:pPr>
-            <a:r>
-              <a:rPr lang="en-US" sz="1400" b="1" spc="200" kern="0" dirty="0">
+            <a:pPr marL="0" indent="0">
+              <a:buNone/>
+            </a:pPr>
+            <a:r>
+              <a:rPr lang="en-US" sz="1400" b="1" kern="0" spc="200" dirty="0">
                 <a:solidFill>
                   <a:schemeClr val="accent2"/>
                 </a:solidFill>
@@ -2613,9 +2386,11 @@
       <p:sp>
         <p:nvSpPr>
           <p:cNvPr id="3" name="Text 0"/>
-          <p:cNvSpPr/>
+          <p:cNvSpPr>
+            <a:spLocks noGrp="1"/>
+          </p:cNvSpPr>
           <p:nvPr>
-            <p:ph idx="100" type="title" hasCustomPrompt="1"/>
+            <p:ph type="title" idx="100" hasCustomPrompt="1"/>
           </p:nvPr>
         </p:nvSpPr>
         <p:spPr>
@@ -2633,7 +2408,7 @@
           <a:bodyPr wrap="square" lIns="0" tIns="0" rIns="0" bIns="0" rtlCol="0" anchor="t"/>
           <a:lstStyle/>
           <a:p>
-            <a:pPr algn="l" indent="0" marL="0">
+            <a:pPr marL="0" indent="0" algn="l">
               <a:buNone/>
             </a:pPr>
             <a:r>
@@ -2651,9 +2426,11 @@
       <p:sp>
         <p:nvSpPr>
           <p:cNvPr id="4" name="Text 0"/>
-          <p:cNvSpPr/>
+          <p:cNvSpPr>
+            <a:spLocks noGrp="1"/>
+          </p:cNvSpPr>
           <p:nvPr>
-            <p:ph idx="101" type="body" hasCustomPrompt="1"/>
+            <p:ph type="body" idx="101" hasCustomPrompt="1"/>
           </p:nvPr>
         </p:nvSpPr>
         <p:spPr>
@@ -2671,7 +2448,7 @@
           <a:bodyPr wrap="square" lIns="0" tIns="0" rIns="0" bIns="0" rtlCol="0" anchor="t"/>
           <a:lstStyle/>
           <a:p>
-            <a:pPr indent="0" marL="0">
+            <a:pPr marL="0" indent="0">
               <a:buNone/>
             </a:pPr>
             <a:r>
@@ -2713,14 +2490,14 @@
       </p:sp>
       <p:pic>
         <p:nvPicPr>
-          <p:cNvPr id="6" name="Portada ícono" descr="preencoded.png">    </p:cNvPr>
+          <p:cNvPr id="6" name="Portada ícono" descr="preencoded.png"/>
           <p:cNvPicPr>
             <a:picLocks noChangeAspect="1"/>
           </p:cNvPicPr>
           <p:nvPr/>
         </p:nvPicPr>
         <p:blipFill>
-          <a:blip r:embed="rId1"/>
+          <a:blip r:embed="rId3"/>
           <a:stretch>
             <a:fillRect/>
           </a:stretch>
@@ -2756,7 +2533,7 @@
           <a:bodyPr wrap="square" lIns="0" tIns="0" rIns="0" bIns="0" rtlCol="0" anchor="t"/>
           <a:lstStyle/>
           <a:p>
-            <a:pPr indent="0" marL="0">
+            <a:pPr marL="0" indent="0">
               <a:buNone/>
             </a:pPr>
             <a:r>
@@ -2776,6 +2553,13 @@
   <p:clrMapOvr>
     <a:masterClrMapping/>
   </p:clrMapOvr>
+  <p:timing>
+    <p:tnLst>
+      <p:par>
+        <p:cTn id="1" dur="indefinite" restart="never" nodeType="tmRoot"/>
+      </p:par>
+    </p:tnLst>
+  </p:timing>
 </p:sld>
 </file>
 
@@ -2799,9 +2583,11 @@
       <p:sp>
         <p:nvSpPr>
           <p:cNvPr id="2" name="Text 1"/>
-          <p:cNvSpPr/>
+          <p:cNvSpPr>
+            <a:spLocks noGrp="1"/>
+          </p:cNvSpPr>
           <p:nvPr>
-            <p:ph idx="101" type="title" hasCustomPrompt="1"/>
+            <p:ph type="title" idx="101" hasCustomPrompt="1"/>
           </p:nvPr>
         </p:nvSpPr>
         <p:spPr>
@@ -2819,7 +2605,7 @@
           <a:bodyPr wrap="square" lIns="0" tIns="0" rIns="0" bIns="0" rtlCol="0" anchor="t"/>
           <a:lstStyle/>
           <a:p>
-            <a:pPr algn="l" indent="0" marL="0">
+            <a:pPr marL="0" indent="0" algn="l">
               <a:buNone/>
             </a:pPr>
             <a:r>
@@ -2903,7 +2689,7 @@
           <a:bodyPr wrap="square" lIns="0" tIns="0" rIns="0" bIns="0" rtlCol="0" anchor="ctr"/>
           <a:lstStyle/>
           <a:p>
-            <a:pPr algn="ctr" indent="0" marL="0">
+            <a:pPr marL="0" indent="0" algn="ctr">
               <a:buNone/>
             </a:pPr>
             <a:r>
@@ -2939,7 +2725,7 @@
           <a:bodyPr wrap="square" lIns="0" tIns="0" rIns="0" bIns="0" rtlCol="0" anchor="t"/>
           <a:lstStyle/>
           <a:p>
-            <a:pPr indent="0" marL="0">
+            <a:pPr marL="0" indent="0">
               <a:buNone/>
             </a:pPr>
             <a:r>
@@ -2975,7 +2761,7 @@
           <a:bodyPr wrap="square" lIns="0" tIns="0" rIns="0" bIns="0" rtlCol="0" anchor="t"/>
           <a:lstStyle/>
           <a:p>
-            <a:pPr indent="0" marL="0">
+            <a:pPr marL="0" indent="0">
               <a:buNone/>
             </a:pPr>
             <a:r>
@@ -3036,7 +2822,7 @@
           <a:bodyPr wrap="square" lIns="0" tIns="0" rIns="0" bIns="0" rtlCol="0" anchor="ctr"/>
           <a:lstStyle/>
           <a:p>
-            <a:pPr algn="ctr" indent="0" marL="0">
+            <a:pPr marL="0" indent="0" algn="ctr">
               <a:buNone/>
             </a:pPr>
             <a:r>
@@ -3072,7 +2858,7 @@
           <a:bodyPr wrap="square" lIns="0" tIns="0" rIns="0" bIns="0" rtlCol="0" anchor="t"/>
           <a:lstStyle/>
           <a:p>
-            <a:pPr indent="0" marL="0">
+            <a:pPr marL="0" indent="0">
               <a:buNone/>
             </a:pPr>
             <a:r>
@@ -3108,7 +2894,7 @@
           <a:bodyPr wrap="square" lIns="0" tIns="0" rIns="0" bIns="0" rtlCol="0" anchor="t"/>
           <a:lstStyle/>
           <a:p>
-            <a:pPr indent="0" marL="0">
+            <a:pPr marL="0" indent="0">
               <a:buNone/>
             </a:pPr>
             <a:r>
@@ -3169,7 +2955,7 @@
           <a:bodyPr wrap="square" lIns="0" tIns="0" rIns="0" bIns="0" rtlCol="0" anchor="ctr"/>
           <a:lstStyle/>
           <a:p>
-            <a:pPr algn="ctr" indent="0" marL="0">
+            <a:pPr marL="0" indent="0" algn="ctr">
               <a:buNone/>
             </a:pPr>
             <a:r>
@@ -3205,7 +2991,7 @@
           <a:bodyPr wrap="square" lIns="0" tIns="0" rIns="0" bIns="0" rtlCol="0" anchor="t"/>
           <a:lstStyle/>
           <a:p>
-            <a:pPr indent="0" marL="0">
+            <a:pPr marL="0" indent="0">
               <a:buNone/>
             </a:pPr>
             <a:r>
@@ -3241,7 +3027,7 @@
           <a:bodyPr wrap="square" lIns="0" tIns="0" rIns="0" bIns="0" rtlCol="0" anchor="t"/>
           <a:lstStyle/>
           <a:p>
-            <a:pPr indent="0" marL="0">
+            <a:pPr marL="0" indent="0">
               <a:buNone/>
             </a:pPr>
             <a:r>
@@ -3302,7 +3088,7 @@
           <a:bodyPr wrap="square" lIns="0" tIns="0" rIns="0" bIns="0" rtlCol="0" anchor="ctr"/>
           <a:lstStyle/>
           <a:p>
-            <a:pPr algn="ctr" indent="0" marL="0">
+            <a:pPr marL="0" indent="0" algn="ctr">
               <a:buNone/>
             </a:pPr>
             <a:r>
@@ -3338,7 +3124,7 @@
           <a:bodyPr wrap="square" lIns="0" tIns="0" rIns="0" bIns="0" rtlCol="0" anchor="t"/>
           <a:lstStyle/>
           <a:p>
-            <a:pPr indent="0" marL="0">
+            <a:pPr marL="0" indent="0">
               <a:buNone/>
             </a:pPr>
             <a:r>
@@ -3374,7 +3160,7 @@
           <a:bodyPr wrap="square" lIns="0" tIns="0" rIns="0" bIns="0" rtlCol="0" anchor="t"/>
           <a:lstStyle/>
           <a:p>
-            <a:pPr indent="0" marL="0">
+            <a:pPr marL="0" indent="0">
               <a:buNone/>
             </a:pPr>
             <a:r>
@@ -3437,7 +3223,7 @@
           <a:bodyPr wrap="square" lIns="0" tIns="0" rIns="0" bIns="0" rtlCol="0" anchor="t"/>
           <a:lstStyle/>
           <a:p>
-            <a:pPr indent="0" marL="0">
+            <a:pPr marL="0" indent="0">
               <a:buNone/>
             </a:pPr>
             <a:r>
@@ -3454,7 +3240,7 @@
             <a:endParaRPr lang="en-US" sz="1400" dirty="0"/>
           </a:p>
           <a:p>
-            <a:pPr indent="0" marL="0">
+            <a:pPr marL="0" indent="0">
               <a:buNone/>
             </a:pPr>
             <a:r>
@@ -3471,13 +3257,13 @@
             <a:endParaRPr lang="en-US" sz="1400" dirty="0"/>
           </a:p>
           <a:p>
-            <a:pPr indent="0" marL="0">
+            <a:pPr marL="0" indent="0">
               <a:buNone/>
             </a:pPr>
             <a:endParaRPr lang="en-US" sz="1400" dirty="0"/>
           </a:p>
           <a:p>
-            <a:pPr indent="0" marL="0">
+            <a:pPr marL="0" indent="0">
               <a:buNone/>
             </a:pPr>
             <a:r>
@@ -3494,7 +3280,7 @@
             <a:endParaRPr lang="en-US" sz="1400" dirty="0"/>
           </a:p>
           <a:p>
-            <a:pPr indent="0" marL="0">
+            <a:pPr marL="0" indent="0">
               <a:buNone/>
             </a:pPr>
             <a:r>
@@ -3533,7 +3319,7 @@
           <a:bodyPr wrap="square" lIns="0" tIns="0" rIns="0" bIns="0" rtlCol="0" anchor="t"/>
           <a:lstStyle/>
           <a:p>
-            <a:pPr indent="0" marL="0">
+            <a:pPr marL="0" indent="0">
               <a:buNone/>
             </a:pPr>
             <a:r>
@@ -3547,7 +3333,7 @@
             <a:endParaRPr lang="en-US" sz="1400" dirty="0"/>
           </a:p>
           <a:p>
-            <a:pPr indent="0" marL="0">
+            <a:pPr marL="0" indent="0">
               <a:buNone/>
             </a:pPr>
             <a:r>
@@ -3561,7 +3347,7 @@
             <a:endParaRPr lang="en-US" sz="1400" dirty="0"/>
           </a:p>
           <a:p>
-            <a:pPr indent="0" marL="0">
+            <a:pPr marL="0" indent="0">
               <a:buNone/>
             </a:pPr>
             <a:r>
@@ -3575,7 +3361,7 @@
             <a:endParaRPr lang="en-US" sz="1400" dirty="0"/>
           </a:p>
           <a:p>
-            <a:pPr indent="0" marL="0">
+            <a:pPr marL="0" indent="0">
               <a:buNone/>
             </a:pPr>
             <a:r>
@@ -3589,7 +3375,7 @@
             <a:endParaRPr lang="en-US" sz="1400" dirty="0"/>
           </a:p>
           <a:p>
-            <a:pPr indent="0" marL="0">
+            <a:pPr marL="0" indent="0">
               <a:buNone/>
             </a:pPr>
             <a:r>
@@ -3624,7 +3410,7 @@
           </a:prstGeom>
           <a:extLst>
             <a:ext uri="{C572A759-6A51-4108-AA02-DFA0A04FC94B}">
-              <ma14:wrappingTextBoxFlag xmlns:ma14="http://schemas.microsoft.com/office/mac/drawingml/2011/main" val="0"/>
+              <ma14:wrappingTextBoxFlag xmlns:ma14="http://schemas.microsoft.com/office/mac/drawingml/2011/main" xmlns="" val="0"/>
             </a:ext>
           </a:extLst>
         </p:spPr>
@@ -3642,7 +3428,7 @@
           <a:p>
             <a:pPr algn="r"/>
             <a:fld id="{F7021451-1387-4CA6-816F-3879F97B5CBC}" type="slidenum">
-              <a:rPr b="0" lang="en-US"/>
+              <a:rPr lang="en-US" b="0"/>
               <a:t>10</a:t>
             </a:fld>
             <a:endParaRPr lang="en-US"/>
@@ -3654,6 +3440,13 @@
   <p:clrMapOvr>
     <a:masterClrMapping/>
   </p:clrMapOvr>
+  <p:timing>
+    <p:tnLst>
+      <p:par>
+        <p:cTn id="1" dur="indefinite" restart="never" nodeType="tmRoot"/>
+      </p:par>
+    </p:tnLst>
+  </p:timing>
 </p:sld>
 </file>
 
@@ -3677,9 +3470,11 @@
       <p:sp>
         <p:nvSpPr>
           <p:cNvPr id="2" name="Text 1"/>
-          <p:cNvSpPr/>
+          <p:cNvSpPr>
+            <a:spLocks noGrp="1"/>
+          </p:cNvSpPr>
           <p:nvPr>
-            <p:ph idx="101" type="title" hasCustomPrompt="1"/>
+            <p:ph type="title" idx="101" hasCustomPrompt="1"/>
           </p:nvPr>
         </p:nvSpPr>
         <p:spPr>
@@ -3697,7 +3492,7 @@
           <a:bodyPr wrap="square" lIns="0" tIns="0" rIns="0" bIns="0" rtlCol="0" anchor="t"/>
           <a:lstStyle/>
           <a:p>
-            <a:pPr algn="l" indent="0" marL="0">
+            <a:pPr marL="0" indent="0" algn="l">
               <a:buNone/>
             </a:pPr>
             <a:r>
@@ -3760,7 +3555,7 @@
           <a:bodyPr wrap="square" lIns="0" tIns="0" rIns="0" bIns="0" rtlCol="0" anchor="t"/>
           <a:lstStyle/>
           <a:p>
-            <a:pPr indent="0" marL="0">
+            <a:pPr marL="0" indent="0">
               <a:buNone/>
             </a:pPr>
             <a:r>
@@ -3777,7 +3572,7 @@
             <a:endParaRPr lang="en-US" sz="1400" dirty="0"/>
           </a:p>
           <a:p>
-            <a:pPr indent="0" marL="0">
+            <a:pPr marL="0" indent="0">
               <a:buNone/>
             </a:pPr>
             <a:r>
@@ -3794,13 +3589,13 @@
             <a:endParaRPr lang="en-US" sz="1400" dirty="0"/>
           </a:p>
           <a:p>
-            <a:pPr indent="0" marL="0">
+            <a:pPr marL="0" indent="0">
               <a:buNone/>
             </a:pPr>
             <a:endParaRPr lang="en-US" sz="1400" dirty="0"/>
           </a:p>
           <a:p>
-            <a:pPr indent="0" marL="0">
+            <a:pPr marL="0" indent="0">
               <a:buNone/>
             </a:pPr>
             <a:r>
@@ -3817,7 +3612,7 @@
             <a:endParaRPr lang="en-US" sz="1400" dirty="0"/>
           </a:p>
           <a:p>
-            <a:pPr indent="0" marL="0">
+            <a:pPr marL="0" indent="0">
               <a:buNone/>
             </a:pPr>
             <a:r>
@@ -3834,13 +3629,13 @@
             <a:endParaRPr lang="en-US" sz="1400" dirty="0"/>
           </a:p>
           <a:p>
-            <a:pPr indent="0" marL="0">
+            <a:pPr marL="0" indent="0">
               <a:buNone/>
             </a:pPr>
             <a:endParaRPr lang="en-US" sz="1400" dirty="0"/>
           </a:p>
           <a:p>
-            <a:pPr indent="0" marL="0">
+            <a:pPr marL="0" indent="0">
               <a:buNone/>
             </a:pPr>
             <a:r>
@@ -3857,7 +3652,7 @@
             <a:endParaRPr lang="en-US" sz="1400" dirty="0"/>
           </a:p>
           <a:p>
-            <a:pPr indent="0" marL="0">
+            <a:pPr marL="0" indent="0">
               <a:buNone/>
             </a:pPr>
             <a:r>
@@ -3874,7 +3669,7 @@
             <a:endParaRPr lang="en-US" sz="1400" dirty="0"/>
           </a:p>
           <a:p>
-            <a:pPr indent="0" marL="0">
+            <a:pPr marL="0" indent="0">
               <a:buNone/>
             </a:pPr>
             <a:r>
@@ -3940,7 +3735,7 @@
           <a:bodyPr wrap="square" lIns="0" tIns="0" rIns="0" bIns="0" rtlCol="0" anchor="t"/>
           <a:lstStyle/>
           <a:p>
-            <a:pPr indent="0" marL="0">
+            <a:pPr marL="0" indent="0">
               <a:buNone/>
             </a:pPr>
             <a:r>
@@ -3957,7 +3752,7 @@
             <a:endParaRPr lang="en-US" sz="1400" dirty="0"/>
           </a:p>
           <a:p>
-            <a:pPr indent="0" marL="0">
+            <a:pPr marL="0" indent="0">
               <a:buNone/>
             </a:pPr>
             <a:r>
@@ -4002,14 +3797,14 @@
       </p:sp>
       <p:pic>
         <p:nvPicPr>
-          <p:cNvPr id="8" name="Restore ícono" descr="preencoded.png">    </p:cNvPr>
+          <p:cNvPr id="8" name="Restore ícono" descr="preencoded.png"/>
           <p:cNvPicPr>
             <a:picLocks noChangeAspect="1"/>
           </p:cNvPicPr>
           <p:nvPr/>
         </p:nvPicPr>
         <p:blipFill>
-          <a:blip r:embed="rId1"/>
+          <a:blip r:embed="rId3"/>
           <a:stretch>
             <a:fillRect/>
           </a:stretch>
@@ -4045,7 +3840,7 @@
           <a:bodyPr wrap="square" lIns="0" tIns="0" rIns="0" bIns="0" rtlCol="0" anchor="t"/>
           <a:lstStyle/>
           <a:p>
-            <a:pPr indent="0" marL="0">
+            <a:pPr marL="0" indent="0">
               <a:buNone/>
             </a:pPr>
             <a:r>
@@ -4081,7 +3876,7 @@
           <a:bodyPr wrap="square" lIns="0" tIns="0" rIns="0" bIns="0" rtlCol="0" anchor="t"/>
           <a:lstStyle/>
           <a:p>
-            <a:pPr indent="0" marL="0">
+            <a:pPr marL="0" indent="0">
               <a:buNone/>
             </a:pPr>
             <a:r>
@@ -4123,14 +3918,14 @@
       </p:sp>
       <p:pic>
         <p:nvPicPr>
-          <p:cNvPr id="12" name="Vacuum ícono" descr="preencoded.png">    </p:cNvPr>
+          <p:cNvPr id="12" name="Vacuum ícono" descr="preencoded.png"/>
           <p:cNvPicPr>
             <a:picLocks noChangeAspect="1"/>
           </p:cNvPicPr>
           <p:nvPr/>
         </p:nvPicPr>
         <p:blipFill>
-          <a:blip r:embed="rId2"/>
+          <a:blip r:embed="rId4"/>
           <a:stretch>
             <a:fillRect/>
           </a:stretch>
@@ -4166,7 +3961,7 @@
           <a:bodyPr wrap="square" lIns="0" tIns="0" rIns="0" bIns="0" rtlCol="0" anchor="t"/>
           <a:lstStyle/>
           <a:p>
-            <a:pPr indent="0" marL="0">
+            <a:pPr marL="0" indent="0">
               <a:buNone/>
             </a:pPr>
             <a:r>
@@ -4202,7 +3997,7 @@
           <a:bodyPr wrap="square" lIns="0" tIns="0" rIns="0" bIns="0" rtlCol="0" anchor="t"/>
           <a:lstStyle/>
           <a:p>
-            <a:pPr indent="0" marL="0">
+            <a:pPr marL="0" indent="0">
               <a:buNone/>
             </a:pPr>
             <a:r>
@@ -4237,7 +4032,7 @@
           </a:prstGeom>
           <a:extLst>
             <a:ext uri="{C572A759-6A51-4108-AA02-DFA0A04FC94B}">
-              <ma14:wrappingTextBoxFlag xmlns:ma14="http://schemas.microsoft.com/office/mac/drawingml/2011/main" val="0"/>
+              <ma14:wrappingTextBoxFlag xmlns:ma14="http://schemas.microsoft.com/office/mac/drawingml/2011/main" xmlns="" val="0"/>
             </a:ext>
           </a:extLst>
         </p:spPr>
@@ -4255,7 +4050,7 @@
           <a:p>
             <a:pPr algn="r"/>
             <a:fld id="{F7021451-1387-4CA6-816F-3879F97B5CBC}" type="slidenum">
-              <a:rPr b="0" lang="en-US"/>
+              <a:rPr lang="en-US" b="0"/>
               <a:t>11</a:t>
             </a:fld>
             <a:endParaRPr lang="en-US"/>
@@ -4267,6 +4062,13 @@
   <p:clrMapOvr>
     <a:masterClrMapping/>
   </p:clrMapOvr>
+  <p:timing>
+    <p:tnLst>
+      <p:par>
+        <p:cTn id="1" dur="indefinite" restart="never" nodeType="tmRoot"/>
+      </p:par>
+    </p:tnLst>
+  </p:timing>
 </p:sld>
 </file>
 
@@ -4290,9 +4092,11 @@
       <p:sp>
         <p:nvSpPr>
           <p:cNvPr id="2" name="Text 1"/>
-          <p:cNvSpPr/>
+          <p:cNvSpPr>
+            <a:spLocks noGrp="1"/>
+          </p:cNvSpPr>
           <p:nvPr>
-            <p:ph idx="101" type="title" hasCustomPrompt="1"/>
+            <p:ph type="title" idx="101" hasCustomPrompt="1"/>
           </p:nvPr>
         </p:nvSpPr>
         <p:spPr>
@@ -4310,7 +4114,7 @@
           <a:bodyPr wrap="square" lIns="0" tIns="0" rIns="0" bIns="0" rtlCol="0" anchor="t"/>
           <a:lstStyle/>
           <a:p>
-            <a:pPr algn="l" indent="0" marL="0">
+            <a:pPr marL="0" indent="0" algn="l">
               <a:buNone/>
             </a:pPr>
             <a:r>
@@ -4346,7 +4150,7 @@
           <a:bodyPr wrap="square" lIns="0" tIns="0" rIns="0" bIns="0" rtlCol="0" anchor="t"/>
           <a:lstStyle/>
           <a:p>
-            <a:pPr indent="0" marL="0">
+            <a:pPr marL="0" indent="0">
               <a:buNone/>
             </a:pPr>
             <a:r>
@@ -4409,7 +4213,7 @@
           <a:bodyPr wrap="square" lIns="0" tIns="0" rIns="0" bIns="0" rtlCol="0" anchor="t"/>
           <a:lstStyle/>
           <a:p>
-            <a:pPr indent="0" marL="0">
+            <a:pPr marL="0" indent="0">
               <a:buNone/>
             </a:pPr>
             <a:r>
@@ -4426,7 +4230,7 @@
             <a:endParaRPr lang="en-US" sz="1400" dirty="0"/>
           </a:p>
           <a:p>
-            <a:pPr indent="0" marL="0">
+            <a:pPr marL="0" indent="0">
               <a:buNone/>
             </a:pPr>
             <a:r>
@@ -4443,7 +4247,7 @@
             <a:endParaRPr lang="en-US" sz="1400" dirty="0"/>
           </a:p>
           <a:p>
-            <a:pPr indent="0" marL="0">
+            <a:pPr marL="0" indent="0">
               <a:buNone/>
             </a:pPr>
             <a:r>
@@ -4460,7 +4264,7 @@
             <a:endParaRPr lang="en-US" sz="1400" dirty="0"/>
           </a:p>
           <a:p>
-            <a:pPr indent="0" marL="0">
+            <a:pPr marL="0" indent="0">
               <a:buNone/>
             </a:pPr>
             <a:r>
@@ -4477,7 +4281,7 @@
             <a:endParaRPr lang="en-US" sz="1400" dirty="0"/>
           </a:p>
           <a:p>
-            <a:pPr indent="0" marL="0">
+            <a:pPr marL="0" indent="0">
               <a:buNone/>
             </a:pPr>
             <a:r>
@@ -4494,13 +4298,13 @@
             <a:endParaRPr lang="en-US" sz="1400" dirty="0"/>
           </a:p>
           <a:p>
-            <a:pPr indent="0" marL="0">
+            <a:pPr marL="0" indent="0">
               <a:buNone/>
             </a:pPr>
             <a:endParaRPr lang="en-US" sz="1400" dirty="0"/>
           </a:p>
           <a:p>
-            <a:pPr indent="0" marL="0">
+            <a:pPr marL="0" indent="0">
               <a:buNone/>
             </a:pPr>
             <a:r>
@@ -4517,7 +4321,7 @@
             <a:endParaRPr lang="en-US" sz="1400" dirty="0"/>
           </a:p>
           <a:p>
-            <a:pPr indent="0" marL="0">
+            <a:pPr marL="0" indent="0">
               <a:buNone/>
             </a:pPr>
             <a:r>
@@ -4534,7 +4338,7 @@
             <a:endParaRPr lang="en-US" sz="1400" dirty="0"/>
           </a:p>
           <a:p>
-            <a:pPr indent="0" marL="0">
+            <a:pPr marL="0" indent="0">
               <a:buNone/>
             </a:pPr>
             <a:r>
@@ -4573,7 +4377,7 @@
           <a:bodyPr wrap="square" lIns="0" tIns="0" rIns="0" bIns="0" rtlCol="0" anchor="t"/>
           <a:lstStyle/>
           <a:p>
-            <a:pPr indent="0" marL="0">
+            <a:pPr marL="0" indent="0">
               <a:buNone/>
             </a:pPr>
             <a:r>
@@ -4639,7 +4443,7 @@
           <a:bodyPr wrap="square" lIns="0" tIns="0" rIns="0" bIns="0" rtlCol="0" anchor="ctr"/>
           <a:lstStyle/>
           <a:p>
-            <a:pPr algn="ctr" indent="0" marL="0">
+            <a:pPr marL="0" indent="0" algn="ctr">
               <a:buNone/>
             </a:pPr>
             <a:r>
@@ -4678,7 +4482,7 @@
           <a:bodyPr wrap="square" lIns="0" tIns="0" rIns="0" bIns="0" rtlCol="0" anchor="t"/>
           <a:lstStyle/>
           <a:p>
-            <a:pPr indent="0" marL="0">
+            <a:pPr marL="0" indent="0">
               <a:buNone/>
             </a:pPr>
             <a:r>
@@ -4741,7 +4545,7 @@
           <a:bodyPr wrap="square" lIns="0" tIns="0" rIns="0" bIns="0" rtlCol="0" anchor="ctr"/>
           <a:lstStyle/>
           <a:p>
-            <a:pPr algn="ctr" indent="0" marL="0">
+            <a:pPr marL="0" indent="0" algn="ctr">
               <a:buNone/>
             </a:pPr>
             <a:r>
@@ -4780,7 +4584,7 @@
           <a:bodyPr wrap="square" lIns="0" tIns="0" rIns="0" bIns="0" rtlCol="0" anchor="t"/>
           <a:lstStyle/>
           <a:p>
-            <a:pPr indent="0" marL="0">
+            <a:pPr marL="0" indent="0">
               <a:buNone/>
             </a:pPr>
             <a:r>
@@ -4843,7 +4647,7 @@
           <a:bodyPr wrap="square" lIns="0" tIns="0" rIns="0" bIns="0" rtlCol="0" anchor="ctr"/>
           <a:lstStyle/>
           <a:p>
-            <a:pPr algn="ctr" indent="0" marL="0">
+            <a:pPr marL="0" indent="0" algn="ctr">
               <a:buNone/>
             </a:pPr>
             <a:r>
@@ -4882,7 +4686,7 @@
           <a:bodyPr wrap="square" lIns="0" tIns="0" rIns="0" bIns="0" rtlCol="0" anchor="t"/>
           <a:lstStyle/>
           <a:p>
-            <a:pPr indent="0" marL="0">
+            <a:pPr marL="0" indent="0">
               <a:buNone/>
             </a:pPr>
             <a:r>
@@ -4945,7 +4749,7 @@
           <a:bodyPr wrap="square" lIns="0" tIns="0" rIns="0" bIns="0" rtlCol="0" anchor="ctr"/>
           <a:lstStyle/>
           <a:p>
-            <a:pPr algn="ctr" indent="0" marL="0">
+            <a:pPr marL="0" indent="0" algn="ctr">
               <a:buNone/>
             </a:pPr>
             <a:r>
@@ -4984,7 +4788,7 @@
           <a:bodyPr wrap="square" lIns="0" tIns="0" rIns="0" bIns="0" rtlCol="0" anchor="t"/>
           <a:lstStyle/>
           <a:p>
-            <a:pPr indent="0" marL="0">
+            <a:pPr marL="0" indent="0">
               <a:buNone/>
             </a:pPr>
             <a:r>
@@ -5019,7 +4823,7 @@
           </a:prstGeom>
           <a:extLst>
             <a:ext uri="{C572A759-6A51-4108-AA02-DFA0A04FC94B}">
-              <ma14:wrappingTextBoxFlag xmlns:ma14="http://schemas.microsoft.com/office/mac/drawingml/2011/main" val="0"/>
+              <ma14:wrappingTextBoxFlag xmlns:ma14="http://schemas.microsoft.com/office/mac/drawingml/2011/main" xmlns="" val="0"/>
             </a:ext>
           </a:extLst>
         </p:spPr>
@@ -5037,7 +4841,7 @@
           <a:p>
             <a:pPr algn="r"/>
             <a:fld id="{F7021451-1387-4CA6-816F-3879F97B5CBC}" type="slidenum">
-              <a:rPr b="0" lang="en-US"/>
+              <a:rPr lang="en-US" b="0"/>
               <a:t>12</a:t>
             </a:fld>
             <a:endParaRPr lang="en-US"/>
@@ -5049,6 +4853,13 @@
   <p:clrMapOvr>
     <a:masterClrMapping/>
   </p:clrMapOvr>
+  <p:timing>
+    <p:tnLst>
+      <p:par>
+        <p:cTn id="1" dur="indefinite" restart="never" nodeType="tmRoot"/>
+      </p:par>
+    </p:tnLst>
+  </p:timing>
 </p:sld>
 </file>
 
@@ -5072,9 +4883,11 @@
       <p:sp>
         <p:nvSpPr>
           <p:cNvPr id="2" name="Text 1"/>
-          <p:cNvSpPr/>
+          <p:cNvSpPr>
+            <a:spLocks noGrp="1"/>
+          </p:cNvSpPr>
           <p:nvPr>
-            <p:ph idx="101" type="title" hasCustomPrompt="1"/>
+            <p:ph type="title" idx="101" hasCustomPrompt="1"/>
           </p:nvPr>
         </p:nvSpPr>
         <p:spPr>
@@ -5092,7 +4905,7 @@
           <a:bodyPr wrap="square" lIns="0" tIns="0" rIns="0" bIns="0" rtlCol="0" anchor="t"/>
           <a:lstStyle/>
           <a:p>
-            <a:pPr algn="l" indent="0" marL="0">
+            <a:pPr marL="0" indent="0" algn="l">
               <a:buNone/>
             </a:pPr>
             <a:r>
@@ -5134,14 +4947,14 @@
       </p:sp>
       <p:pic>
         <p:nvPicPr>
-          <p:cNvPr id="4" name="Schema enforcement ícono" descr="preencoded.png">    </p:cNvPr>
+          <p:cNvPr id="4" name="Schema enforcement ícono" descr="preencoded.png"/>
           <p:cNvPicPr>
             <a:picLocks noChangeAspect="1"/>
           </p:cNvPicPr>
           <p:nvPr/>
         </p:nvPicPr>
         <p:blipFill>
-          <a:blip r:embed="rId1"/>
+          <a:blip r:embed="rId3"/>
           <a:stretch>
             <a:fillRect/>
           </a:stretch>
@@ -5177,7 +4990,7 @@
           <a:bodyPr wrap="square" lIns="0" tIns="0" rIns="0" bIns="0" rtlCol="0" anchor="t"/>
           <a:lstStyle/>
           <a:p>
-            <a:pPr indent="0" marL="0">
+            <a:pPr marL="0" indent="0">
               <a:buNone/>
             </a:pPr>
             <a:r>
@@ -5213,7 +5026,7 @@
           <a:bodyPr wrap="square" lIns="0" tIns="0" rIns="0" bIns="0" rtlCol="0" anchor="t"/>
           <a:lstStyle/>
           <a:p>
-            <a:pPr indent="0" marL="0">
+            <a:pPr marL="0" indent="0">
               <a:buNone/>
             </a:pPr>
             <a:r>
@@ -5276,7 +5089,7 @@
           <a:bodyPr wrap="square" lIns="0" tIns="0" rIns="0" bIns="0" rtlCol="0" anchor="t"/>
           <a:lstStyle/>
           <a:p>
-            <a:pPr indent="0" marL="0">
+            <a:pPr marL="0" indent="0">
               <a:buNone/>
             </a:pPr>
             <a:r>
@@ -5293,7 +5106,7 @@
             <a:endParaRPr lang="en-US" sz="1400" dirty="0"/>
           </a:p>
           <a:p>
-            <a:pPr indent="0" marL="0">
+            <a:pPr marL="0" indent="0">
               <a:buNone/>
             </a:pPr>
             <a:r>
@@ -5310,7 +5123,7 @@
             <a:endParaRPr lang="en-US" sz="1400" dirty="0"/>
           </a:p>
           <a:p>
-            <a:pPr indent="0" marL="0">
+            <a:pPr marL="0" indent="0">
               <a:buNone/>
             </a:pPr>
             <a:r>
@@ -5355,14 +5168,14 @@
       </p:sp>
       <p:pic>
         <p:nvPicPr>
-          <p:cNvPr id="10" name="Schema evolution ícono" descr="preencoded.png">    </p:cNvPr>
+          <p:cNvPr id="10" name="Schema evolution ícono" descr="preencoded.png"/>
           <p:cNvPicPr>
             <a:picLocks noChangeAspect="1"/>
           </p:cNvPicPr>
           <p:nvPr/>
         </p:nvPicPr>
         <p:blipFill>
-          <a:blip r:embed="rId2"/>
+          <a:blip r:embed="rId4"/>
           <a:stretch>
             <a:fillRect/>
           </a:stretch>
@@ -5398,7 +5211,7 @@
           <a:bodyPr wrap="square" lIns="0" tIns="0" rIns="0" bIns="0" rtlCol="0" anchor="t"/>
           <a:lstStyle/>
           <a:p>
-            <a:pPr indent="0" marL="0">
+            <a:pPr marL="0" indent="0">
               <a:buNone/>
             </a:pPr>
             <a:r>
@@ -5434,7 +5247,7 @@
           <a:bodyPr wrap="square" lIns="0" tIns="0" rIns="0" bIns="0" rtlCol="0" anchor="t"/>
           <a:lstStyle/>
           <a:p>
-            <a:pPr indent="0" marL="0">
+            <a:pPr marL="0" indent="0">
               <a:buNone/>
             </a:pPr>
             <a:r>
@@ -5497,7 +5310,7 @@
           <a:bodyPr wrap="square" lIns="0" tIns="0" rIns="0" bIns="0" rtlCol="0" anchor="t"/>
           <a:lstStyle/>
           <a:p>
-            <a:pPr indent="0" marL="0">
+            <a:pPr marL="0" indent="0">
               <a:buNone/>
             </a:pPr>
             <a:r>
@@ -5514,7 +5327,7 @@
             <a:endParaRPr lang="en-US" sz="1400" dirty="0"/>
           </a:p>
           <a:p>
-            <a:pPr indent="0" marL="0">
+            <a:pPr marL="0" indent="0">
               <a:buNone/>
             </a:pPr>
             <a:r>
@@ -5531,7 +5344,7 @@
             <a:endParaRPr lang="en-US" sz="1400" dirty="0"/>
           </a:p>
           <a:p>
-            <a:pPr indent="0" marL="0">
+            <a:pPr marL="0" indent="0">
               <a:buNone/>
             </a:pPr>
             <a:r>
@@ -5570,7 +5383,7 @@
           <a:bodyPr wrap="square" lIns="0" tIns="0" rIns="0" bIns="0" rtlCol="0" anchor="t"/>
           <a:lstStyle/>
           <a:p>
-            <a:pPr indent="0" marL="0">
+            <a:pPr marL="0" indent="0">
               <a:buNone/>
             </a:pPr>
             <a:r>
@@ -5605,7 +5418,7 @@
           </a:prstGeom>
           <a:extLst>
             <a:ext uri="{C572A759-6A51-4108-AA02-DFA0A04FC94B}">
-              <ma14:wrappingTextBoxFlag xmlns:ma14="http://schemas.microsoft.com/office/mac/drawingml/2011/main" val="0"/>
+              <ma14:wrappingTextBoxFlag xmlns:ma14="http://schemas.microsoft.com/office/mac/drawingml/2011/main" xmlns="" val="0"/>
             </a:ext>
           </a:extLst>
         </p:spPr>
@@ -5623,7 +5436,7 @@
           <a:p>
             <a:pPr algn="r"/>
             <a:fld id="{F7021451-1387-4CA6-816F-3879F97B5CBC}" type="slidenum">
-              <a:rPr b="0" lang="en-US"/>
+              <a:rPr lang="en-US" b="0"/>
               <a:t>13</a:t>
             </a:fld>
             <a:endParaRPr lang="en-US"/>
@@ -5635,6 +5448,13 @@
   <p:clrMapOvr>
     <a:masterClrMapping/>
   </p:clrMapOvr>
+  <p:timing>
+    <p:tnLst>
+      <p:par>
+        <p:cTn id="1" dur="indefinite" restart="never" nodeType="tmRoot"/>
+      </p:par>
+    </p:tnLst>
+  </p:timing>
 </p:sld>
 </file>
 
@@ -5658,9 +5478,11 @@
       <p:sp>
         <p:nvSpPr>
           <p:cNvPr id="2" name="Text 1"/>
-          <p:cNvSpPr/>
+          <p:cNvSpPr>
+            <a:spLocks noGrp="1"/>
+          </p:cNvSpPr>
           <p:nvPr>
-            <p:ph idx="101" type="title" hasCustomPrompt="1"/>
+            <p:ph type="title" idx="101" hasCustomPrompt="1"/>
           </p:nvPr>
         </p:nvSpPr>
         <p:spPr>
@@ -5678,7 +5500,7 @@
           <a:bodyPr wrap="square" lIns="0" tIns="0" rIns="0" bIns="0" rtlCol="0" anchor="t"/>
           <a:lstStyle/>
           <a:p>
-            <a:pPr algn="l" indent="0" marL="0">
+            <a:pPr marL="0" indent="0" algn="l">
               <a:buNone/>
             </a:pPr>
             <a:r>
@@ -5747,14 +5569,14 @@
       </p:sp>
       <p:pic>
         <p:nvPicPr>
-          <p:cNvPr id="5" name="Examen Compute ícono" descr="preencoded.png">    </p:cNvPr>
+          <p:cNvPr id="5" name="Examen Compute ícono" descr="preencoded.png"/>
           <p:cNvPicPr>
             <a:picLocks noChangeAspect="1"/>
           </p:cNvPicPr>
           <p:nvPr/>
         </p:nvPicPr>
         <p:blipFill>
-          <a:blip r:embed="rId1"/>
+          <a:blip r:embed="rId3"/>
           <a:stretch>
             <a:fillRect/>
           </a:stretch>
@@ -5790,7 +5612,7 @@
           <a:bodyPr wrap="square" lIns="0" tIns="0" rIns="0" bIns="0" rtlCol="0" anchor="t"/>
           <a:lstStyle/>
           <a:p>
-            <a:pPr indent="0" marL="0">
+            <a:pPr marL="0" indent="0">
               <a:buNone/>
             </a:pPr>
             <a:r>
@@ -5826,7 +5648,7 @@
           <a:bodyPr wrap="square" lIns="0" tIns="0" rIns="0" bIns="0" rtlCol="0" anchor="t"/>
           <a:lstStyle/>
           <a:p>
-            <a:pPr indent="0" marL="0">
+            <a:pPr marL="0" indent="0">
               <a:buNone/>
             </a:pPr>
             <a:r>
@@ -5895,14 +5717,14 @@
       </p:sp>
       <p:pic>
         <p:nvPicPr>
-          <p:cNvPr id="10" name="Examen Unity Catalog ícono" descr="preencoded.png">    </p:cNvPr>
+          <p:cNvPr id="10" name="Examen Unity Catalog ícono" descr="preencoded.png"/>
           <p:cNvPicPr>
             <a:picLocks noChangeAspect="1"/>
           </p:cNvPicPr>
           <p:nvPr/>
         </p:nvPicPr>
         <p:blipFill>
-          <a:blip r:embed="rId2"/>
+          <a:blip r:embed="rId3"/>
           <a:stretch>
             <a:fillRect/>
           </a:stretch>
@@ -5938,7 +5760,7 @@
           <a:bodyPr wrap="square" lIns="0" tIns="0" rIns="0" bIns="0" rtlCol="0" anchor="t"/>
           <a:lstStyle/>
           <a:p>
-            <a:pPr indent="0" marL="0">
+            <a:pPr marL="0" indent="0">
               <a:buNone/>
             </a:pPr>
             <a:r>
@@ -5974,7 +5796,7 @@
           <a:bodyPr wrap="square" lIns="0" tIns="0" rIns="0" bIns="0" rtlCol="0" anchor="t"/>
           <a:lstStyle/>
           <a:p>
-            <a:pPr indent="0" marL="0">
+            <a:pPr marL="0" indent="0">
               <a:buNone/>
             </a:pPr>
             <a:r>
@@ -6043,7 +5865,7 @@
       </p:sp>
       <p:pic>
         <p:nvPicPr>
-          <p:cNvPr id="15" name="Examen Delta Log ícono" descr="preencoded.png">    </p:cNvPr>
+          <p:cNvPr id="15" name="Examen Delta Log ícono" descr="preencoded.png"/>
           <p:cNvPicPr>
             <a:picLocks noChangeAspect="1"/>
           </p:cNvPicPr>
@@ -6086,7 +5908,7 @@
           <a:bodyPr wrap="square" lIns="0" tIns="0" rIns="0" bIns="0" rtlCol="0" anchor="t"/>
           <a:lstStyle/>
           <a:p>
-            <a:pPr indent="0" marL="0">
+            <a:pPr marL="0" indent="0">
               <a:buNone/>
             </a:pPr>
             <a:r>
@@ -6122,7 +5944,7 @@
           <a:bodyPr wrap="square" lIns="0" tIns="0" rIns="0" bIns="0" rtlCol="0" anchor="t"/>
           <a:lstStyle/>
           <a:p>
-            <a:pPr indent="0" marL="0">
+            <a:pPr marL="0" indent="0">
               <a:buNone/>
             </a:pPr>
             <a:r>
@@ -6191,14 +6013,14 @@
       </p:sp>
       <p:pic>
         <p:nvPicPr>
-          <p:cNvPr id="20" name="Examen Time travel ícono" descr="preencoded.png">    </p:cNvPr>
+          <p:cNvPr id="20" name="Examen Time travel ícono" descr="preencoded.png"/>
           <p:cNvPicPr>
             <a:picLocks noChangeAspect="1"/>
           </p:cNvPicPr>
           <p:nvPr/>
         </p:nvPicPr>
         <p:blipFill>
-          <a:blip r:embed="rId4"/>
+          <a:blip r:embed="rId3"/>
           <a:stretch>
             <a:fillRect/>
           </a:stretch>
@@ -6234,7 +6056,7 @@
           <a:bodyPr wrap="square" lIns="0" tIns="0" rIns="0" bIns="0" rtlCol="0" anchor="t"/>
           <a:lstStyle/>
           <a:p>
-            <a:pPr indent="0" marL="0">
+            <a:pPr marL="0" indent="0">
               <a:buNone/>
             </a:pPr>
             <a:r>
@@ -6270,7 +6092,7 @@
           <a:bodyPr wrap="square" lIns="0" tIns="0" rIns="0" bIns="0" rtlCol="0" anchor="t"/>
           <a:lstStyle/>
           <a:p>
-            <a:pPr indent="0" marL="0">
+            <a:pPr marL="0" indent="0">
               <a:buNone/>
             </a:pPr>
             <a:r>
@@ -6339,14 +6161,14 @@
       </p:sp>
       <p:pic>
         <p:nvPicPr>
-          <p:cNvPr id="25" name="Examen Change Data Feed ícono" descr="preencoded.png">    </p:cNvPr>
+          <p:cNvPr id="25" name="Examen Change Data Feed ícono" descr="preencoded.png"/>
           <p:cNvPicPr>
             <a:picLocks noChangeAspect="1"/>
           </p:cNvPicPr>
           <p:nvPr/>
         </p:nvPicPr>
         <p:blipFill>
-          <a:blip r:embed="rId5"/>
+          <a:blip r:embed="rId3"/>
           <a:stretch>
             <a:fillRect/>
           </a:stretch>
@@ -6382,7 +6204,7 @@
           <a:bodyPr wrap="square" lIns="0" tIns="0" rIns="0" bIns="0" rtlCol="0" anchor="t"/>
           <a:lstStyle/>
           <a:p>
-            <a:pPr indent="0" marL="0">
+            <a:pPr marL="0" indent="0">
               <a:buNone/>
             </a:pPr>
             <a:r>
@@ -6418,7 +6240,7 @@
           <a:bodyPr wrap="square" lIns="0" tIns="0" rIns="0" bIns="0" rtlCol="0" anchor="t"/>
           <a:lstStyle/>
           <a:p>
-            <a:pPr indent="0" marL="0">
+            <a:pPr marL="0" indent="0">
               <a:buNone/>
             </a:pPr>
             <a:r>
@@ -6487,14 +6309,14 @@
       </p:sp>
       <p:pic>
         <p:nvPicPr>
-          <p:cNvPr id="30" name="Examen Schema ícono" descr="preencoded.png">    </p:cNvPr>
+          <p:cNvPr id="30" name="Examen Schema ícono" descr="preencoded.png"/>
           <p:cNvPicPr>
             <a:picLocks noChangeAspect="1"/>
           </p:cNvPicPr>
           <p:nvPr/>
         </p:nvPicPr>
         <p:blipFill>
-          <a:blip r:embed="rId6"/>
+          <a:blip r:embed="rId3"/>
           <a:stretch>
             <a:fillRect/>
           </a:stretch>
@@ -6530,7 +6352,7 @@
           <a:bodyPr wrap="square" lIns="0" tIns="0" rIns="0" bIns="0" rtlCol="0" anchor="t"/>
           <a:lstStyle/>
           <a:p>
-            <a:pPr indent="0" marL="0">
+            <a:pPr marL="0" indent="0">
               <a:buNone/>
             </a:pPr>
             <a:r>
@@ -6566,7 +6388,7 @@
           <a:bodyPr wrap="square" lIns="0" tIns="0" rIns="0" bIns="0" rtlCol="0" anchor="t"/>
           <a:lstStyle/>
           <a:p>
-            <a:pPr indent="0" marL="0">
+            <a:pPr marL="0" indent="0">
               <a:buNone/>
             </a:pPr>
             <a:r>
@@ -6583,7 +6405,7 @@
       </p:sp>
       <p:sp>
         <p:nvSpPr>
-          <p:cNvPr id="25" name="Slide Number Placeholder 0"/>
+          <p:cNvPr id="33" name="Slide Number Placeholder 0"/>
           <p:cNvSpPr>
             <a:spLocks noGrp="1"/>
           </p:cNvSpPr>
@@ -6601,7 +6423,7 @@
           </a:prstGeom>
           <a:extLst>
             <a:ext uri="{C572A759-6A51-4108-AA02-DFA0A04FC94B}">
-              <ma14:wrappingTextBoxFlag xmlns:ma14="http://schemas.microsoft.com/office/mac/drawingml/2011/main" val="0"/>
+              <ma14:wrappingTextBoxFlag xmlns:ma14="http://schemas.microsoft.com/office/mac/drawingml/2011/main" xmlns="" val="0"/>
             </a:ext>
           </a:extLst>
         </p:spPr>
@@ -6619,7 +6441,7 @@
           <a:p>
             <a:pPr algn="r"/>
             <a:fld id="{F7021451-1387-4CA6-816F-3879F97B5CBC}" type="slidenum">
-              <a:rPr b="0" lang="en-US"/>
+              <a:rPr lang="en-US" b="0"/>
               <a:t>14</a:t>
             </a:fld>
             <a:endParaRPr lang="en-US"/>
@@ -6631,6 +6453,13 @@
   <p:clrMapOvr>
     <a:masterClrMapping/>
   </p:clrMapOvr>
+  <p:timing>
+    <p:tnLst>
+      <p:par>
+        <p:cTn id="1" dur="indefinite" restart="never" nodeType="tmRoot"/>
+      </p:par>
+    </p:tnLst>
+  </p:timing>
 </p:sld>
 </file>
 
@@ -6672,11 +6501,11 @@
           <a:bodyPr wrap="square" lIns="0" tIns="0" rIns="0" bIns="0" rtlCol="0" anchor="t"/>
           <a:lstStyle/>
           <a:p>
-            <a:pPr indent="0" marL="0">
-              <a:buNone/>
-            </a:pPr>
-            <a:r>
-              <a:rPr lang="en-US" sz="1400" b="1" spc="200" kern="0" dirty="0">
+            <a:pPr marL="0" indent="0">
+              <a:buNone/>
+            </a:pPr>
+            <a:r>
+              <a:rPr lang="en-US" sz="1400" b="1" kern="0" spc="200" dirty="0">
                 <a:solidFill>
                   <a:schemeClr val="accent2"/>
                 </a:solidFill>
@@ -6690,14 +6519,16 @@
       <p:sp>
         <p:nvSpPr>
           <p:cNvPr id="3" name="Text 0"/>
-          <p:cNvSpPr/>
+          <p:cNvSpPr>
+            <a:spLocks noGrp="1"/>
+          </p:cNvSpPr>
           <p:nvPr>
-            <p:ph idx="100" type="title" hasCustomPrompt="1"/>
+            <p:ph type="title" idx="100" hasCustomPrompt="1"/>
           </p:nvPr>
         </p:nvSpPr>
         <p:spPr>
           <a:xfrm>
-            <a:off x="548640" y="2103120"/>
+            <a:off x="548640" y="1828800"/>
             <a:ext cx="8686800" cy="1737360"/>
           </a:xfrm>
           <a:prstGeom prst="rect">
@@ -6710,7 +6541,7 @@
           <a:bodyPr wrap="square" lIns="0" tIns="0" rIns="0" bIns="0" rtlCol="0" anchor="t"/>
           <a:lstStyle/>
           <a:p>
-            <a:pPr algn="l" indent="0" marL="0">
+            <a:pPr marL="0" indent="0" algn="l">
               <a:buNone/>
             </a:pPr>
             <a:r>
@@ -6719,7 +6550,23 @@
                   <a:schemeClr val="bg1"/>
                 </a:solidFill>
               </a:rPr>
-              <a:t>Abre el notebook 00_delta_lake y ejecútalo de arriba hacia abajo</a:t>
+              <a:t>Abre el notebook </a:t>
+            </a:r>
+            <a:r>
+              <a:rPr lang="en-US" sz="4400" b="1" dirty="0" smtClean="0">
+                <a:solidFill>
+                  <a:schemeClr val="bg1"/>
+                </a:solidFill>
+              </a:rPr>
+              <a:t>00_plataforma_y_delta_lake </a:t>
+            </a:r>
+            <a:r>
+              <a:rPr lang="en-US" sz="4400" b="1" dirty="0">
+                <a:solidFill>
+                  <a:schemeClr val="bg1"/>
+                </a:solidFill>
+              </a:rPr>
+              <a:t>y ejecútalo de arriba hacia abajo</a:t>
             </a:r>
             <a:endParaRPr lang="en-US" sz="4400" dirty="0"/>
           </a:p>
@@ -6728,9 +6575,11 @@
       <p:sp>
         <p:nvSpPr>
           <p:cNvPr id="4" name="Text 0"/>
-          <p:cNvSpPr/>
+          <p:cNvSpPr>
+            <a:spLocks noGrp="1"/>
+          </p:cNvSpPr>
           <p:nvPr>
-            <p:ph idx="101" type="body" hasCustomPrompt="1"/>
+            <p:ph type="body" idx="101" hasCustomPrompt="1"/>
           </p:nvPr>
         </p:nvSpPr>
         <p:spPr>
@@ -6748,7 +6597,7 @@
           <a:bodyPr wrap="square" lIns="0" tIns="0" rIns="0" bIns="0" rtlCol="0" anchor="t"/>
           <a:lstStyle/>
           <a:p>
-            <a:pPr indent="0" marL="0">
+            <a:pPr marL="0" indent="0">
               <a:buNone/>
             </a:pPr>
             <a:r>
@@ -6790,14 +6639,14 @@
       </p:sp>
       <p:pic>
         <p:nvPicPr>
-          <p:cNvPr id="6" name="Cierre ícono" descr="preencoded.png">    </p:cNvPr>
+          <p:cNvPr id="6" name="Cierre ícono" descr="preencoded.png"/>
           <p:cNvPicPr>
             <a:picLocks noChangeAspect="1"/>
           </p:cNvPicPr>
           <p:nvPr/>
         </p:nvPicPr>
         <p:blipFill>
-          <a:blip r:embed="rId1"/>
+          <a:blip r:embed="rId3"/>
           <a:stretch>
             <a:fillRect/>
           </a:stretch>
@@ -6817,6 +6666,13 @@
   <p:clrMapOvr>
     <a:masterClrMapping/>
   </p:clrMapOvr>
+  <p:timing>
+    <p:tnLst>
+      <p:par>
+        <p:cTn id="1" dur="indefinite" restart="never" nodeType="tmRoot"/>
+      </p:par>
+    </p:tnLst>
+  </p:timing>
 </p:sld>
 </file>
 
@@ -6840,9 +6696,11 @@
       <p:sp>
         <p:nvSpPr>
           <p:cNvPr id="2" name="Text 1"/>
-          <p:cNvSpPr/>
+          <p:cNvSpPr>
+            <a:spLocks noGrp="1"/>
+          </p:cNvSpPr>
           <p:nvPr>
-            <p:ph idx="101" type="title" hasCustomPrompt="1"/>
+            <p:ph type="title" idx="101" hasCustomPrompt="1"/>
           </p:nvPr>
         </p:nvSpPr>
         <p:spPr>
@@ -6860,7 +6718,7 @@
           <a:bodyPr wrap="square" lIns="0" tIns="0" rIns="0" bIns="0" rtlCol="0" anchor="t"/>
           <a:lstStyle/>
           <a:p>
-            <a:pPr algn="l" indent="0" marL="0">
+            <a:pPr marL="0" indent="0" algn="l">
               <a:buNone/>
             </a:pPr>
             <a:r>
@@ -6902,14 +6760,14 @@
       </p:sp>
       <p:pic>
         <p:nvPicPr>
-          <p:cNvPr id="4" name="Agenda 1 ícono" descr="preencoded.png">    </p:cNvPr>
+          <p:cNvPr id="4" name="Agenda 1 ícono" descr="preencoded.png"/>
           <p:cNvPicPr>
             <a:picLocks noChangeAspect="1"/>
           </p:cNvPicPr>
           <p:nvPr/>
         </p:nvPicPr>
         <p:blipFill>
-          <a:blip r:embed="rId1"/>
+          <a:blip r:embed="rId3"/>
           <a:stretch>
             <a:fillRect/>
           </a:stretch>
@@ -6945,7 +6803,7 @@
           <a:bodyPr wrap="square" lIns="0" tIns="0" rIns="0" bIns="0" rtlCol="0" anchor="t"/>
           <a:lstStyle/>
           <a:p>
-            <a:pPr indent="0" marL="0">
+            <a:pPr marL="0" indent="0">
               <a:buNone/>
             </a:pPr>
             <a:r>
@@ -6981,7 +6839,7 @@
           <a:bodyPr wrap="square" lIns="0" tIns="0" rIns="0" bIns="0" rtlCol="0" anchor="t"/>
           <a:lstStyle/>
           <a:p>
-            <a:pPr indent="0" marL="0">
+            <a:pPr marL="0" indent="0">
               <a:buNone/>
             </a:pPr>
             <a:r>
@@ -7017,7 +6875,7 @@
           <a:bodyPr wrap="square" lIns="0" tIns="0" rIns="0" bIns="0" rtlCol="0" anchor="t"/>
           <a:lstStyle/>
           <a:p>
-            <a:pPr algn="r" indent="0" marL="0">
+            <a:pPr marL="0" indent="0" algn="r">
               <a:buNone/>
             </a:pPr>
             <a:r>
@@ -7059,14 +6917,14 @@
       </p:sp>
       <p:pic>
         <p:nvPicPr>
-          <p:cNvPr id="9" name="Agenda 2 ícono" descr="preencoded.png">    </p:cNvPr>
+          <p:cNvPr id="9" name="Agenda 2 ícono" descr="preencoded.png"/>
           <p:cNvPicPr>
             <a:picLocks noChangeAspect="1"/>
           </p:cNvPicPr>
           <p:nvPr/>
         </p:nvPicPr>
         <p:blipFill>
-          <a:blip r:embed="rId2"/>
+          <a:blip r:embed="rId4"/>
           <a:stretch>
             <a:fillRect/>
           </a:stretch>
@@ -7102,7 +6960,7 @@
           <a:bodyPr wrap="square" lIns="0" tIns="0" rIns="0" bIns="0" rtlCol="0" anchor="t"/>
           <a:lstStyle/>
           <a:p>
-            <a:pPr indent="0" marL="0">
+            <a:pPr marL="0" indent="0">
               <a:buNone/>
             </a:pPr>
             <a:r>
@@ -7138,7 +6996,7 @@
           <a:bodyPr wrap="square" lIns="0" tIns="0" rIns="0" bIns="0" rtlCol="0" anchor="t"/>
           <a:lstStyle/>
           <a:p>
-            <a:pPr indent="0" marL="0">
+            <a:pPr marL="0" indent="0">
               <a:buNone/>
             </a:pPr>
             <a:r>
@@ -7174,7 +7032,7 @@
           <a:bodyPr wrap="square" lIns="0" tIns="0" rIns="0" bIns="0" rtlCol="0" anchor="t"/>
           <a:lstStyle/>
           <a:p>
-            <a:pPr algn="r" indent="0" marL="0">
+            <a:pPr marL="0" indent="0" algn="r">
               <a:buNone/>
             </a:pPr>
             <a:r>
@@ -7216,14 +7074,14 @@
       </p:sp>
       <p:pic>
         <p:nvPicPr>
-          <p:cNvPr id="14" name="Agenda 3 ícono" descr="preencoded.png">    </p:cNvPr>
+          <p:cNvPr id="14" name="Agenda 3 ícono" descr="preencoded.png"/>
           <p:cNvPicPr>
             <a:picLocks noChangeAspect="1"/>
           </p:cNvPicPr>
           <p:nvPr/>
         </p:nvPicPr>
         <p:blipFill>
-          <a:blip r:embed="rId3"/>
+          <a:blip r:embed="rId5"/>
           <a:stretch>
             <a:fillRect/>
           </a:stretch>
@@ -7259,7 +7117,7 @@
           <a:bodyPr wrap="square" lIns="0" tIns="0" rIns="0" bIns="0" rtlCol="0" anchor="t"/>
           <a:lstStyle/>
           <a:p>
-            <a:pPr indent="0" marL="0">
+            <a:pPr marL="0" indent="0">
               <a:buNone/>
             </a:pPr>
             <a:r>
@@ -7295,7 +7153,7 @@
           <a:bodyPr wrap="square" lIns="0" tIns="0" rIns="0" bIns="0" rtlCol="0" anchor="t"/>
           <a:lstStyle/>
           <a:p>
-            <a:pPr indent="0" marL="0">
+            <a:pPr marL="0" indent="0">
               <a:buNone/>
             </a:pPr>
             <a:r>
@@ -7331,7 +7189,7 @@
           <a:bodyPr wrap="square" lIns="0" tIns="0" rIns="0" bIns="0" rtlCol="0" anchor="t"/>
           <a:lstStyle/>
           <a:p>
-            <a:pPr algn="r" indent="0" marL="0">
+            <a:pPr marL="0" indent="0" algn="r">
               <a:buNone/>
             </a:pPr>
             <a:r>
@@ -7373,14 +7231,14 @@
       </p:sp>
       <p:pic>
         <p:nvPicPr>
-          <p:cNvPr id="19" name="Agenda 4 ícono" descr="preencoded.png">    </p:cNvPr>
+          <p:cNvPr id="19" name="Agenda 4 ícono" descr="preencoded.png"/>
           <p:cNvPicPr>
             <a:picLocks noChangeAspect="1"/>
           </p:cNvPicPr>
           <p:nvPr/>
         </p:nvPicPr>
         <p:blipFill>
-          <a:blip r:embed="rId4"/>
+          <a:blip r:embed="rId6"/>
           <a:stretch>
             <a:fillRect/>
           </a:stretch>
@@ -7416,7 +7274,7 @@
           <a:bodyPr wrap="square" lIns="0" tIns="0" rIns="0" bIns="0" rtlCol="0" anchor="t"/>
           <a:lstStyle/>
           <a:p>
-            <a:pPr indent="0" marL="0">
+            <a:pPr marL="0" indent="0">
               <a:buNone/>
             </a:pPr>
             <a:r>
@@ -7452,7 +7310,7 @@
           <a:bodyPr wrap="square" lIns="0" tIns="0" rIns="0" bIns="0" rtlCol="0" anchor="t"/>
           <a:lstStyle/>
           <a:p>
-            <a:pPr indent="0" marL="0">
+            <a:pPr marL="0" indent="0">
               <a:buNone/>
             </a:pPr>
             <a:r>
@@ -7488,7 +7346,7 @@
           <a:bodyPr wrap="square" lIns="0" tIns="0" rIns="0" bIns="0" rtlCol="0" anchor="t"/>
           <a:lstStyle/>
           <a:p>
-            <a:pPr algn="r" indent="0" marL="0">
+            <a:pPr marL="0" indent="0" algn="r">
               <a:buNone/>
             </a:pPr>
             <a:r>
@@ -7530,14 +7388,14 @@
       </p:sp>
       <p:pic>
         <p:nvPicPr>
-          <p:cNvPr id="24" name="Agenda 5 ícono" descr="preencoded.png">    </p:cNvPr>
+          <p:cNvPr id="24" name="Agenda 5 ícono" descr="preencoded.png"/>
           <p:cNvPicPr>
             <a:picLocks noChangeAspect="1"/>
           </p:cNvPicPr>
           <p:nvPr/>
         </p:nvPicPr>
         <p:blipFill>
-          <a:blip r:embed="rId5"/>
+          <a:blip r:embed="rId7"/>
           <a:stretch>
             <a:fillRect/>
           </a:stretch>
@@ -7573,7 +7431,7 @@
           <a:bodyPr wrap="square" lIns="0" tIns="0" rIns="0" bIns="0" rtlCol="0" anchor="t"/>
           <a:lstStyle/>
           <a:p>
-            <a:pPr indent="0" marL="0">
+            <a:pPr marL="0" indent="0">
               <a:buNone/>
             </a:pPr>
             <a:r>
@@ -7609,7 +7467,7 @@
           <a:bodyPr wrap="square" lIns="0" tIns="0" rIns="0" bIns="0" rtlCol="0" anchor="t"/>
           <a:lstStyle/>
           <a:p>
-            <a:pPr indent="0" marL="0">
+            <a:pPr marL="0" indent="0">
               <a:buNone/>
             </a:pPr>
             <a:r>
@@ -7645,7 +7503,7 @@
           <a:bodyPr wrap="square" lIns="0" tIns="0" rIns="0" bIns="0" rtlCol="0" anchor="t"/>
           <a:lstStyle/>
           <a:p>
-            <a:pPr algn="r" indent="0" marL="0">
+            <a:pPr marL="0" indent="0" algn="r">
               <a:buNone/>
             </a:pPr>
             <a:r>
@@ -7662,7 +7520,7 @@
       </p:sp>
       <p:sp>
         <p:nvSpPr>
-          <p:cNvPr id="25" name="Slide Number Placeholder 0"/>
+          <p:cNvPr id="28" name="Slide Number Placeholder 0"/>
           <p:cNvSpPr>
             <a:spLocks noGrp="1"/>
           </p:cNvSpPr>
@@ -7680,7 +7538,7 @@
           </a:prstGeom>
           <a:extLst>
             <a:ext uri="{C572A759-6A51-4108-AA02-DFA0A04FC94B}">
-              <ma14:wrappingTextBoxFlag xmlns:ma14="http://schemas.microsoft.com/office/mac/drawingml/2011/main" val="0"/>
+              <ma14:wrappingTextBoxFlag xmlns:ma14="http://schemas.microsoft.com/office/mac/drawingml/2011/main" xmlns="" val="0"/>
             </a:ext>
           </a:extLst>
         </p:spPr>
@@ -7698,7 +7556,7 @@
           <a:p>
             <a:pPr algn="r"/>
             <a:fld id="{F7021451-1387-4CA6-816F-3879F97B5CBC}" type="slidenum">
-              <a:rPr b="0" lang="en-US"/>
+              <a:rPr lang="en-US" b="0"/>
               <a:t>2</a:t>
             </a:fld>
             <a:endParaRPr lang="en-US"/>
@@ -7710,6 +7568,13 @@
   <p:clrMapOvr>
     <a:masterClrMapping/>
   </p:clrMapOvr>
+  <p:timing>
+    <p:tnLst>
+      <p:par>
+        <p:cTn id="1" dur="indefinite" restart="never" nodeType="tmRoot"/>
+      </p:par>
+    </p:tnLst>
+  </p:timing>
 </p:sld>
 </file>
 
@@ -7751,7 +7616,7 @@
           <a:bodyPr wrap="square" lIns="0" tIns="0" rIns="0" bIns="0" rtlCol="0" anchor="t"/>
           <a:lstStyle/>
           <a:p>
-            <a:pPr indent="0" marL="0">
+            <a:pPr marL="0" indent="0">
               <a:buNone/>
             </a:pPr>
             <a:r>
@@ -7769,9 +7634,11 @@
       <p:sp>
         <p:nvSpPr>
           <p:cNvPr id="3" name="Text 0"/>
-          <p:cNvSpPr/>
+          <p:cNvSpPr>
+            <a:spLocks noGrp="1"/>
+          </p:cNvSpPr>
           <p:nvPr>
-            <p:ph idx="100" type="title" hasCustomPrompt="1"/>
+            <p:ph type="title" idx="100" hasCustomPrompt="1"/>
           </p:nvPr>
         </p:nvSpPr>
         <p:spPr>
@@ -7789,7 +7656,7 @@
           <a:bodyPr wrap="square" lIns="0" tIns="0" rIns="0" bIns="0" rtlCol="0"/>
           <a:lstStyle/>
           <a:p>
-            <a:pPr algn="l" indent="0" marL="0">
+            <a:pPr marL="0" indent="0" algn="l">
               <a:buNone/>
             </a:pPr>
             <a:r>
@@ -7807,9 +7674,11 @@
       <p:sp>
         <p:nvSpPr>
           <p:cNvPr id="4" name="Text 0"/>
-          <p:cNvSpPr/>
+          <p:cNvSpPr>
+            <a:spLocks noGrp="1"/>
+          </p:cNvSpPr>
           <p:nvPr>
-            <p:ph idx="101" type="body" hasCustomPrompt="1"/>
+            <p:ph type="body" idx="101" hasCustomPrompt="1"/>
           </p:nvPr>
         </p:nvSpPr>
         <p:spPr>
@@ -7827,7 +7696,7 @@
           <a:bodyPr wrap="square" lIns="0" tIns="0" rIns="0" bIns="0" rtlCol="0"/>
           <a:lstStyle/>
           <a:p>
-            <a:pPr indent="0" marL="0">
+            <a:pPr marL="0" indent="0">
               <a:buNone/>
             </a:pPr>
             <a:r>
@@ -7847,6 +7716,13 @@
   <p:clrMapOvr>
     <a:masterClrMapping/>
   </p:clrMapOvr>
+  <p:timing>
+    <p:tnLst>
+      <p:par>
+        <p:cTn id="1" dur="indefinite" restart="never" nodeType="tmRoot"/>
+      </p:par>
+    </p:tnLst>
+  </p:timing>
 </p:sld>
 </file>
 
@@ -7870,9 +7746,11 @@
       <p:sp>
         <p:nvSpPr>
           <p:cNvPr id="2" name="Text 1"/>
-          <p:cNvSpPr/>
+          <p:cNvSpPr>
+            <a:spLocks noGrp="1"/>
+          </p:cNvSpPr>
           <p:nvPr>
-            <p:ph idx="101" type="title" hasCustomPrompt="1"/>
+            <p:ph type="title" idx="101" hasCustomPrompt="1"/>
           </p:nvPr>
         </p:nvSpPr>
         <p:spPr>
@@ -7890,7 +7768,7 @@
           <a:bodyPr wrap="square" lIns="0" tIns="0" rIns="0" bIns="0" rtlCol="0" anchor="t"/>
           <a:lstStyle/>
           <a:p>
-            <a:pPr algn="l" indent="0" marL="0">
+            <a:pPr marL="0" indent="0" algn="l">
               <a:buNone/>
             </a:pPr>
             <a:r>
@@ -7959,14 +7837,14 @@
       </p:sp>
       <p:pic>
         <p:nvPicPr>
-          <p:cNvPr id="5" name="Workspace ícono" descr="preencoded.png">    </p:cNvPr>
+          <p:cNvPr id="5" name="Workspace ícono" descr="preencoded.png"/>
           <p:cNvPicPr>
             <a:picLocks noChangeAspect="1"/>
           </p:cNvPicPr>
           <p:nvPr/>
         </p:nvPicPr>
         <p:blipFill>
-          <a:blip r:embed="rId1"/>
+          <a:blip r:embed="rId3"/>
           <a:stretch>
             <a:fillRect/>
           </a:stretch>
@@ -8002,7 +7880,7 @@
           <a:bodyPr wrap="square" lIns="0" tIns="0" rIns="0" bIns="0" rtlCol="0" anchor="t"/>
           <a:lstStyle/>
           <a:p>
-            <a:pPr indent="0" marL="0">
+            <a:pPr marL="0" indent="0">
               <a:buNone/>
             </a:pPr>
             <a:r>
@@ -8038,7 +7916,7 @@
           <a:bodyPr wrap="square" lIns="0" tIns="0" rIns="0" bIns="0" rtlCol="0" anchor="t"/>
           <a:lstStyle/>
           <a:p>
-            <a:pPr indent="0" marL="0">
+            <a:pPr marL="0" indent="0">
               <a:buNone/>
             </a:pPr>
             <a:r>
@@ -8107,14 +7985,14 @@
       </p:sp>
       <p:pic>
         <p:nvPicPr>
-          <p:cNvPr id="10" name="Catalog ícono" descr="preencoded.png">    </p:cNvPr>
+          <p:cNvPr id="10" name="Catalog ícono" descr="preencoded.png"/>
           <p:cNvPicPr>
             <a:picLocks noChangeAspect="1"/>
           </p:cNvPicPr>
           <p:nvPr/>
         </p:nvPicPr>
         <p:blipFill>
-          <a:blip r:embed="rId2"/>
+          <a:blip r:embed="rId4"/>
           <a:stretch>
             <a:fillRect/>
           </a:stretch>
@@ -8150,7 +8028,7 @@
           <a:bodyPr wrap="square" lIns="0" tIns="0" rIns="0" bIns="0" rtlCol="0" anchor="t"/>
           <a:lstStyle/>
           <a:p>
-            <a:pPr indent="0" marL="0">
+            <a:pPr marL="0" indent="0">
               <a:buNone/>
             </a:pPr>
             <a:r>
@@ -8186,7 +8064,7 @@
           <a:bodyPr wrap="square" lIns="0" tIns="0" rIns="0" bIns="0" rtlCol="0" anchor="t"/>
           <a:lstStyle/>
           <a:p>
-            <a:pPr indent="0" marL="0">
+            <a:pPr marL="0" indent="0">
               <a:buNone/>
             </a:pPr>
             <a:r>
@@ -8255,14 +8133,14 @@
       </p:sp>
       <p:pic>
         <p:nvPicPr>
-          <p:cNvPr id="15" name="SQL Editor ícono" descr="preencoded.png">    </p:cNvPr>
+          <p:cNvPr id="15" name="SQL Editor ícono" descr="preencoded.png"/>
           <p:cNvPicPr>
             <a:picLocks noChangeAspect="1"/>
           </p:cNvPicPr>
           <p:nvPr/>
         </p:nvPicPr>
         <p:blipFill>
-          <a:blip r:embed="rId3"/>
+          <a:blip r:embed="rId5"/>
           <a:stretch>
             <a:fillRect/>
           </a:stretch>
@@ -8298,7 +8176,7 @@
           <a:bodyPr wrap="square" lIns="0" tIns="0" rIns="0" bIns="0" rtlCol="0" anchor="t"/>
           <a:lstStyle/>
           <a:p>
-            <a:pPr indent="0" marL="0">
+            <a:pPr marL="0" indent="0">
               <a:buNone/>
             </a:pPr>
             <a:r>
@@ -8334,7 +8212,7 @@
           <a:bodyPr wrap="square" lIns="0" tIns="0" rIns="0" bIns="0" rtlCol="0" anchor="t"/>
           <a:lstStyle/>
           <a:p>
-            <a:pPr indent="0" marL="0">
+            <a:pPr marL="0" indent="0">
               <a:buNone/>
             </a:pPr>
             <a:r>
@@ -8403,14 +8281,14 @@
       </p:sp>
       <p:pic>
         <p:nvPicPr>
-          <p:cNvPr id="20" name="Jobs &amp; Pipelines ícono" descr="preencoded.png">    </p:cNvPr>
+          <p:cNvPr id="20" name="Jobs &amp; Pipelines ícono" descr="preencoded.png"/>
           <p:cNvPicPr>
             <a:picLocks noChangeAspect="1"/>
           </p:cNvPicPr>
           <p:nvPr/>
         </p:nvPicPr>
         <p:blipFill>
-          <a:blip r:embed="rId4"/>
+          <a:blip r:embed="rId6"/>
           <a:stretch>
             <a:fillRect/>
           </a:stretch>
@@ -8446,7 +8324,7 @@
           <a:bodyPr wrap="square" lIns="0" tIns="0" rIns="0" bIns="0" rtlCol="0" anchor="t"/>
           <a:lstStyle/>
           <a:p>
-            <a:pPr indent="0" marL="0">
+            <a:pPr marL="0" indent="0">
               <a:buNone/>
             </a:pPr>
             <a:r>
@@ -8482,7 +8360,7 @@
           <a:bodyPr wrap="square" lIns="0" tIns="0" rIns="0" bIns="0" rtlCol="0" anchor="t"/>
           <a:lstStyle/>
           <a:p>
-            <a:pPr indent="0" marL="0">
+            <a:pPr marL="0" indent="0">
               <a:buNone/>
             </a:pPr>
             <a:r>
@@ -8551,14 +8429,14 @@
       </p:sp>
       <p:pic>
         <p:nvPicPr>
-          <p:cNvPr id="25" name="Compute ícono" descr="preencoded.png">    </p:cNvPr>
+          <p:cNvPr id="25" name="Compute ícono" descr="preencoded.png"/>
           <p:cNvPicPr>
             <a:picLocks noChangeAspect="1"/>
           </p:cNvPicPr>
           <p:nvPr/>
         </p:nvPicPr>
         <p:blipFill>
-          <a:blip r:embed="rId5"/>
+          <a:blip r:embed="rId7"/>
           <a:stretch>
             <a:fillRect/>
           </a:stretch>
@@ -8594,7 +8472,7 @@
           <a:bodyPr wrap="square" lIns="0" tIns="0" rIns="0" bIns="0" rtlCol="0" anchor="t"/>
           <a:lstStyle/>
           <a:p>
-            <a:pPr indent="0" marL="0">
+            <a:pPr marL="0" indent="0">
               <a:buNone/>
             </a:pPr>
             <a:r>
@@ -8630,7 +8508,7 @@
           <a:bodyPr wrap="square" lIns="0" tIns="0" rIns="0" bIns="0" rtlCol="0" anchor="t"/>
           <a:lstStyle/>
           <a:p>
-            <a:pPr indent="0" marL="0">
+            <a:pPr marL="0" indent="0">
               <a:buNone/>
             </a:pPr>
             <a:r>
@@ -8693,7 +8571,7 @@
           <a:bodyPr wrap="square" lIns="0" tIns="0" rIns="0" bIns="0" rtlCol="0" anchor="t"/>
           <a:lstStyle/>
           <a:p>
-            <a:pPr indent="0" marL="0">
+            <a:pPr marL="0" indent="0">
               <a:buNone/>
             </a:pPr>
             <a:r>
@@ -8729,7 +8607,7 @@
           <a:bodyPr wrap="square" lIns="0" tIns="0" rIns="0" bIns="0" rtlCol="0" anchor="t"/>
           <a:lstStyle/>
           <a:p>
-            <a:pPr indent="0" marL="0">
+            <a:pPr marL="0" indent="0">
               <a:buNone/>
             </a:pPr>
             <a:r>
@@ -8746,7 +8624,7 @@
       </p:sp>
       <p:sp>
         <p:nvSpPr>
-          <p:cNvPr id="25" name="Slide Number Placeholder 0"/>
+          <p:cNvPr id="31" name="Slide Number Placeholder 0"/>
           <p:cNvSpPr>
             <a:spLocks noGrp="1"/>
           </p:cNvSpPr>
@@ -8764,7 +8642,7 @@
           </a:prstGeom>
           <a:extLst>
             <a:ext uri="{C572A759-6A51-4108-AA02-DFA0A04FC94B}">
-              <ma14:wrappingTextBoxFlag xmlns:ma14="http://schemas.microsoft.com/office/mac/drawingml/2011/main" val="0"/>
+              <ma14:wrappingTextBoxFlag xmlns:ma14="http://schemas.microsoft.com/office/mac/drawingml/2011/main" xmlns="" val="0"/>
             </a:ext>
           </a:extLst>
         </p:spPr>
@@ -8782,7 +8660,7 @@
           <a:p>
             <a:pPr algn="r"/>
             <a:fld id="{F7021451-1387-4CA6-816F-3879F97B5CBC}" type="slidenum">
-              <a:rPr b="0" lang="en-US"/>
+              <a:rPr lang="en-US" b="0"/>
               <a:t>4</a:t>
             </a:fld>
             <a:endParaRPr lang="en-US"/>
@@ -8794,6 +8672,13 @@
   <p:clrMapOvr>
     <a:masterClrMapping/>
   </p:clrMapOvr>
+  <p:timing>
+    <p:tnLst>
+      <p:par>
+        <p:cTn id="1" dur="indefinite" restart="never" nodeType="tmRoot"/>
+      </p:par>
+    </p:tnLst>
+  </p:timing>
 </p:sld>
 </file>
 
@@ -8817,9 +8702,11 @@
       <p:sp>
         <p:nvSpPr>
           <p:cNvPr id="2" name="Text 1"/>
-          <p:cNvSpPr/>
+          <p:cNvSpPr>
+            <a:spLocks noGrp="1"/>
+          </p:cNvSpPr>
           <p:nvPr>
-            <p:ph idx="101" type="title" hasCustomPrompt="1"/>
+            <p:ph type="title" idx="101" hasCustomPrompt="1"/>
           </p:nvPr>
         </p:nvSpPr>
         <p:spPr>
@@ -8837,7 +8724,7 @@
           <a:bodyPr wrap="square" lIns="0" tIns="0" rIns="0" bIns="0" rtlCol="0" anchor="t"/>
           <a:lstStyle/>
           <a:p>
-            <a:pPr algn="l" indent="0" marL="0">
+            <a:pPr marL="0" indent="0" algn="l">
               <a:buNone/>
             </a:pPr>
             <a:r>
@@ -8906,14 +8793,14 @@
       </p:sp>
       <p:pic>
         <p:nvPicPr>
-          <p:cNvPr id="5" name="Serverless ícono" descr="preencoded.png">    </p:cNvPr>
+          <p:cNvPr id="5" name="Serverless ícono" descr="preencoded.png"/>
           <p:cNvPicPr>
             <a:picLocks noChangeAspect="1"/>
           </p:cNvPicPr>
           <p:nvPr/>
         </p:nvPicPr>
         <p:blipFill>
-          <a:blip r:embed="rId1"/>
+          <a:blip r:embed="rId3"/>
           <a:stretch>
             <a:fillRect/>
           </a:stretch>
@@ -8949,7 +8836,7 @@
           <a:bodyPr wrap="square" lIns="0" tIns="0" rIns="0" bIns="0" rtlCol="0" anchor="t"/>
           <a:lstStyle/>
           <a:p>
-            <a:pPr indent="0" marL="0">
+            <a:pPr marL="0" indent="0">
               <a:buNone/>
             </a:pPr>
             <a:r>
@@ -8985,7 +8872,7 @@
           <a:bodyPr wrap="square" lIns="0" tIns="0" rIns="0" bIns="0" rtlCol="0" anchor="t"/>
           <a:lstStyle/>
           <a:p>
-            <a:pPr indent="0" marL="0">
+            <a:pPr marL="0" indent="0">
               <a:buNone/>
             </a:pPr>
             <a:r>
@@ -9021,7 +8908,7 @@
           <a:bodyPr wrap="square" lIns="0" tIns="0" rIns="0" bIns="0" rtlCol="0" anchor="t"/>
           <a:lstStyle/>
           <a:p>
-            <a:pPr indent="0" marL="0">
+            <a:pPr marL="0" indent="0">
               <a:buNone/>
             </a:pPr>
             <a:r>
@@ -9090,14 +8977,14 @@
       </p:sp>
       <p:pic>
         <p:nvPicPr>
-          <p:cNvPr id="11" name="All-purpose cluster ícono" descr="preencoded.png">    </p:cNvPr>
+          <p:cNvPr id="11" name="All-purpose cluster ícono" descr="preencoded.png"/>
           <p:cNvPicPr>
             <a:picLocks noChangeAspect="1"/>
           </p:cNvPicPr>
           <p:nvPr/>
         </p:nvPicPr>
         <p:blipFill>
-          <a:blip r:embed="rId2"/>
+          <a:blip r:embed="rId4"/>
           <a:stretch>
             <a:fillRect/>
           </a:stretch>
@@ -9133,7 +9020,7 @@
           <a:bodyPr wrap="square" lIns="0" tIns="0" rIns="0" bIns="0" rtlCol="0" anchor="t"/>
           <a:lstStyle/>
           <a:p>
-            <a:pPr indent="0" marL="0">
+            <a:pPr marL="0" indent="0">
               <a:buNone/>
             </a:pPr>
             <a:r>
@@ -9169,7 +9056,7 @@
           <a:bodyPr wrap="square" lIns="0" tIns="0" rIns="0" bIns="0" rtlCol="0" anchor="t"/>
           <a:lstStyle/>
           <a:p>
-            <a:pPr indent="0" marL="0">
+            <a:pPr marL="0" indent="0">
               <a:buNone/>
             </a:pPr>
             <a:r>
@@ -9205,7 +9092,7 @@
           <a:bodyPr wrap="square" lIns="0" tIns="0" rIns="0" bIns="0" rtlCol="0" anchor="t"/>
           <a:lstStyle/>
           <a:p>
-            <a:pPr indent="0" marL="0">
+            <a:pPr marL="0" indent="0">
               <a:buNone/>
             </a:pPr>
             <a:r>
@@ -9274,14 +9161,14 @@
       </p:sp>
       <p:pic>
         <p:nvPicPr>
-          <p:cNvPr id="17" name="Job compute ícono" descr="preencoded.png">    </p:cNvPr>
+          <p:cNvPr id="17" name="Job compute ícono" descr="preencoded.png"/>
           <p:cNvPicPr>
             <a:picLocks noChangeAspect="1"/>
           </p:cNvPicPr>
           <p:nvPr/>
         </p:nvPicPr>
         <p:blipFill>
-          <a:blip r:embed="rId3"/>
+          <a:blip r:embed="rId5"/>
           <a:stretch>
             <a:fillRect/>
           </a:stretch>
@@ -9317,7 +9204,7 @@
           <a:bodyPr wrap="square" lIns="0" tIns="0" rIns="0" bIns="0" rtlCol="0" anchor="t"/>
           <a:lstStyle/>
           <a:p>
-            <a:pPr indent="0" marL="0">
+            <a:pPr marL="0" indent="0">
               <a:buNone/>
             </a:pPr>
             <a:r>
@@ -9353,7 +9240,7 @@
           <a:bodyPr wrap="square" lIns="0" tIns="0" rIns="0" bIns="0" rtlCol="0" anchor="t"/>
           <a:lstStyle/>
           <a:p>
-            <a:pPr indent="0" marL="0">
+            <a:pPr marL="0" indent="0">
               <a:buNone/>
             </a:pPr>
             <a:r>
@@ -9389,7 +9276,7 @@
           <a:bodyPr wrap="square" lIns="0" tIns="0" rIns="0" bIns="0" rtlCol="0" anchor="t"/>
           <a:lstStyle/>
           <a:p>
-            <a:pPr indent="0" marL="0">
+            <a:pPr marL="0" indent="0">
               <a:buNone/>
             </a:pPr>
             <a:r>
@@ -9458,14 +9345,14 @@
       </p:sp>
       <p:pic>
         <p:nvPicPr>
-          <p:cNvPr id="23" name="SQL warehouse ícono" descr="preencoded.png">    </p:cNvPr>
+          <p:cNvPr id="23" name="SQL warehouse ícono" descr="preencoded.png"/>
           <p:cNvPicPr>
             <a:picLocks noChangeAspect="1"/>
           </p:cNvPicPr>
           <p:nvPr/>
         </p:nvPicPr>
         <p:blipFill>
-          <a:blip r:embed="rId4"/>
+          <a:blip r:embed="rId6"/>
           <a:stretch>
             <a:fillRect/>
           </a:stretch>
@@ -9501,7 +9388,7 @@
           <a:bodyPr wrap="square" lIns="0" tIns="0" rIns="0" bIns="0" rtlCol="0" anchor="t"/>
           <a:lstStyle/>
           <a:p>
-            <a:pPr indent="0" marL="0">
+            <a:pPr marL="0" indent="0">
               <a:buNone/>
             </a:pPr>
             <a:r>
@@ -9537,7 +9424,7 @@
           <a:bodyPr wrap="square" lIns="0" tIns="0" rIns="0" bIns="0" rtlCol="0" anchor="t"/>
           <a:lstStyle/>
           <a:p>
-            <a:pPr indent="0" marL="0">
+            <a:pPr marL="0" indent="0">
               <a:buNone/>
             </a:pPr>
             <a:r>
@@ -9573,7 +9460,7 @@
           <a:bodyPr wrap="square" lIns="0" tIns="0" rIns="0" bIns="0" rtlCol="0" anchor="t"/>
           <a:lstStyle/>
           <a:p>
-            <a:pPr indent="0" marL="0">
+            <a:pPr marL="0" indent="0">
               <a:buNone/>
             </a:pPr>
             <a:r>
@@ -9590,7 +9477,7 @@
       </p:sp>
       <p:sp>
         <p:nvSpPr>
-          <p:cNvPr id="25" name="Slide Number Placeholder 0"/>
+          <p:cNvPr id="27" name="Slide Number Placeholder 0"/>
           <p:cNvSpPr>
             <a:spLocks noGrp="1"/>
           </p:cNvSpPr>
@@ -9608,7 +9495,7 @@
           </a:prstGeom>
           <a:extLst>
             <a:ext uri="{C572A759-6A51-4108-AA02-DFA0A04FC94B}">
-              <ma14:wrappingTextBoxFlag xmlns:ma14="http://schemas.microsoft.com/office/mac/drawingml/2011/main" val="0"/>
+              <ma14:wrappingTextBoxFlag xmlns:ma14="http://schemas.microsoft.com/office/mac/drawingml/2011/main" xmlns="" val="0"/>
             </a:ext>
           </a:extLst>
         </p:spPr>
@@ -9626,7 +9513,7 @@
           <a:p>
             <a:pPr algn="r"/>
             <a:fld id="{F7021451-1387-4CA6-816F-3879F97B5CBC}" type="slidenum">
-              <a:rPr b="0" lang="en-US"/>
+              <a:rPr lang="en-US" b="0"/>
               <a:t>5</a:t>
             </a:fld>
             <a:endParaRPr lang="en-US"/>
@@ -9638,6 +9525,13 @@
   <p:clrMapOvr>
     <a:masterClrMapping/>
   </p:clrMapOvr>
+  <p:timing>
+    <p:tnLst>
+      <p:par>
+        <p:cTn id="1" dur="indefinite" restart="never" nodeType="tmRoot"/>
+      </p:par>
+    </p:tnLst>
+  </p:timing>
 </p:sld>
 </file>
 
@@ -9661,9 +9555,11 @@
       <p:sp>
         <p:nvSpPr>
           <p:cNvPr id="2" name="Text 1"/>
-          <p:cNvSpPr/>
+          <p:cNvSpPr>
+            <a:spLocks noGrp="1"/>
+          </p:cNvSpPr>
           <p:nvPr>
-            <p:ph idx="101" type="title" hasCustomPrompt="1"/>
+            <p:ph type="title" idx="101" hasCustomPrompt="1"/>
           </p:nvPr>
         </p:nvSpPr>
         <p:spPr>
@@ -9681,7 +9577,7 @@
           <a:bodyPr wrap="square" lIns="0" tIns="0" rIns="0" bIns="0" rtlCol="0" anchor="t"/>
           <a:lstStyle/>
           <a:p>
-            <a:pPr algn="l" indent="0" marL="0">
+            <a:pPr marL="0" indent="0" algn="l">
               <a:buNone/>
             </a:pPr>
             <a:r>
@@ -9744,7 +9640,7 @@
           <a:bodyPr wrap="square" lIns="0" tIns="0" rIns="0" bIns="0" rtlCol="0" anchor="t"/>
           <a:lstStyle/>
           <a:p>
-            <a:pPr indent="0" marL="0">
+            <a:pPr marL="0" indent="0">
               <a:buNone/>
             </a:pPr>
             <a:r>
@@ -9758,7 +9654,7 @@
             <a:endParaRPr lang="en-US" sz="1700" dirty="0"/>
           </a:p>
           <a:p>
-            <a:pPr indent="0" marL="0">
+            <a:pPr marL="0" indent="0">
               <a:buNone/>
             </a:pPr>
             <a:r>
@@ -9821,7 +9717,7 @@
           <a:bodyPr wrap="square" lIns="0" tIns="0" rIns="0" bIns="0" rtlCol="0" anchor="t"/>
           <a:lstStyle/>
           <a:p>
-            <a:pPr indent="0" marL="0">
+            <a:pPr marL="0" indent="0">
               <a:buNone/>
             </a:pPr>
             <a:r>
@@ -9835,7 +9731,7 @@
             <a:endParaRPr lang="en-US" sz="1700" dirty="0"/>
           </a:p>
           <a:p>
-            <a:pPr indent="0" marL="0">
+            <a:pPr marL="0" indent="0">
               <a:buNone/>
             </a:pPr>
             <a:r>
@@ -9898,7 +9794,7 @@
           <a:bodyPr wrap="square" lIns="0" tIns="0" rIns="0" bIns="0" rtlCol="0" anchor="t"/>
           <a:lstStyle/>
           <a:p>
-            <a:pPr indent="0" marL="0">
+            <a:pPr marL="0" indent="0">
               <a:buNone/>
             </a:pPr>
             <a:r>
@@ -9912,7 +9808,7 @@
             <a:endParaRPr lang="en-US" sz="1700" dirty="0"/>
           </a:p>
           <a:p>
-            <a:pPr indent="0" marL="0">
+            <a:pPr marL="0" indent="0">
               <a:buNone/>
             </a:pPr>
             <a:r>
@@ -9975,7 +9871,7 @@
           <a:bodyPr wrap="square" lIns="0" tIns="0" rIns="0" bIns="0" rtlCol="0" anchor="t"/>
           <a:lstStyle/>
           <a:p>
-            <a:pPr indent="0" marL="0">
+            <a:pPr marL="0" indent="0">
               <a:buNone/>
             </a:pPr>
             <a:r>
@@ -9989,7 +9885,7 @@
             <a:endParaRPr lang="en-US" sz="1700" dirty="0"/>
           </a:p>
           <a:p>
-            <a:pPr indent="0" marL="0">
+            <a:pPr marL="0" indent="0">
               <a:buNone/>
             </a:pPr>
             <a:r>
@@ -10025,7 +9921,7 @@
           <a:bodyPr wrap="square" lIns="0" tIns="0" rIns="0" bIns="0" rtlCol="0" anchor="t"/>
           <a:lstStyle/>
           <a:p>
-            <a:pPr indent="0" marL="0">
+            <a:pPr marL="0" indent="0">
               <a:buNone/>
             </a:pPr>
             <a:r>
@@ -10088,7 +9984,7 @@
           <a:bodyPr wrap="square" lIns="0" tIns="0" rIns="0" bIns="0" rtlCol="0" anchor="t"/>
           <a:lstStyle/>
           <a:p>
-            <a:pPr indent="0" marL="0">
+            <a:pPr marL="0" indent="0">
               <a:buNone/>
             </a:pPr>
             <a:r>
@@ -10127,7 +10023,7 @@
           <a:bodyPr wrap="square" lIns="0" tIns="0" rIns="0" bIns="0" rtlCol="0" anchor="t"/>
           <a:lstStyle/>
           <a:p>
-            <a:pPr indent="0" marL="0">
+            <a:pPr marL="0" indent="0">
               <a:buNone/>
             </a:pPr>
             <a:r>
@@ -10163,7 +10059,7 @@
           <a:bodyPr wrap="square" lIns="0" tIns="0" rIns="0" bIns="0" rtlCol="0" anchor="t"/>
           <a:lstStyle/>
           <a:p>
-            <a:pPr indent="0" marL="0">
+            <a:pPr marL="0" indent="0">
               <a:buNone/>
             </a:pPr>
             <a:r>
@@ -10198,7 +10094,7 @@
           </a:prstGeom>
           <a:extLst>
             <a:ext uri="{C572A759-6A51-4108-AA02-DFA0A04FC94B}">
-              <ma14:wrappingTextBoxFlag xmlns:ma14="http://schemas.microsoft.com/office/mac/drawingml/2011/main" val="0"/>
+              <ma14:wrappingTextBoxFlag xmlns:ma14="http://schemas.microsoft.com/office/mac/drawingml/2011/main" xmlns="" val="0"/>
             </a:ext>
           </a:extLst>
         </p:spPr>
@@ -10216,7 +10112,7 @@
           <a:p>
             <a:pPr algn="r"/>
             <a:fld id="{F7021451-1387-4CA6-816F-3879F97B5CBC}" type="slidenum">
-              <a:rPr b="0" lang="en-US"/>
+              <a:rPr lang="en-US" b="0"/>
               <a:t>6</a:t>
             </a:fld>
             <a:endParaRPr lang="en-US"/>
@@ -10228,6 +10124,13 @@
   <p:clrMapOvr>
     <a:masterClrMapping/>
   </p:clrMapOvr>
+  <p:timing>
+    <p:tnLst>
+      <p:par>
+        <p:cTn id="1" dur="indefinite" restart="never" nodeType="tmRoot"/>
+      </p:par>
+    </p:tnLst>
+  </p:timing>
 </p:sld>
 </file>
 
@@ -10269,7 +10172,7 @@
           <a:bodyPr wrap="square" lIns="0" tIns="0" rIns="0" bIns="0" rtlCol="0" anchor="t"/>
           <a:lstStyle/>
           <a:p>
-            <a:pPr indent="0" marL="0">
+            <a:pPr marL="0" indent="0">
               <a:buNone/>
             </a:pPr>
             <a:r>
@@ -10287,9 +10190,11 @@
       <p:sp>
         <p:nvSpPr>
           <p:cNvPr id="3" name="Text 0"/>
-          <p:cNvSpPr/>
+          <p:cNvSpPr>
+            <a:spLocks noGrp="1"/>
+          </p:cNvSpPr>
           <p:nvPr>
-            <p:ph idx="100" type="title" hasCustomPrompt="1"/>
+            <p:ph type="title" idx="100" hasCustomPrompt="1"/>
           </p:nvPr>
         </p:nvSpPr>
         <p:spPr>
@@ -10307,7 +10212,7 @@
           <a:bodyPr wrap="square" lIns="0" tIns="0" rIns="0" bIns="0" rtlCol="0"/>
           <a:lstStyle/>
           <a:p>
-            <a:pPr algn="l" indent="0" marL="0">
+            <a:pPr marL="0" indent="0" algn="l">
               <a:buNone/>
             </a:pPr>
             <a:r>
@@ -10325,9 +10230,11 @@
       <p:sp>
         <p:nvSpPr>
           <p:cNvPr id="4" name="Text 0"/>
-          <p:cNvSpPr/>
+          <p:cNvSpPr>
+            <a:spLocks noGrp="1"/>
+          </p:cNvSpPr>
           <p:nvPr>
-            <p:ph idx="101" type="body" hasCustomPrompt="1"/>
+            <p:ph type="body" idx="101" hasCustomPrompt="1"/>
           </p:nvPr>
         </p:nvSpPr>
         <p:spPr>
@@ -10345,7 +10252,7 @@
           <a:bodyPr wrap="square" lIns="0" tIns="0" rIns="0" bIns="0" rtlCol="0"/>
           <a:lstStyle/>
           <a:p>
-            <a:pPr indent="0" marL="0">
+            <a:pPr marL="0" indent="0">
               <a:buNone/>
             </a:pPr>
             <a:r>
@@ -10365,6 +10272,13 @@
   <p:clrMapOvr>
     <a:masterClrMapping/>
   </p:clrMapOvr>
+  <p:timing>
+    <p:tnLst>
+      <p:par>
+        <p:cTn id="1" dur="indefinite" restart="never" nodeType="tmRoot"/>
+      </p:par>
+    </p:tnLst>
+  </p:timing>
 </p:sld>
 </file>
 
@@ -10388,9 +10302,11 @@
       <p:sp>
         <p:nvSpPr>
           <p:cNvPr id="2" name="Text 1"/>
-          <p:cNvSpPr/>
+          <p:cNvSpPr>
+            <a:spLocks noGrp="1"/>
+          </p:cNvSpPr>
           <p:nvPr>
-            <p:ph idx="101" type="title" hasCustomPrompt="1"/>
+            <p:ph type="title" idx="101" hasCustomPrompt="1"/>
           </p:nvPr>
         </p:nvSpPr>
         <p:spPr>
@@ -10408,7 +10324,7 @@
           <a:bodyPr wrap="square" lIns="0" tIns="0" rIns="0" bIns="0" rtlCol="0" anchor="t"/>
           <a:lstStyle/>
           <a:p>
-            <a:pPr algn="l" indent="0" marL="0">
+            <a:pPr marL="0" indent="0" algn="l">
               <a:buNone/>
             </a:pPr>
             <a:r>
@@ -10477,14 +10393,14 @@
       </p:sp>
       <p:pic>
         <p:nvPicPr>
-          <p:cNvPr id="5" name="Data lake ícono" descr="preencoded.png">    </p:cNvPr>
+          <p:cNvPr id="5" name="Data lake ícono" descr="preencoded.png"/>
           <p:cNvPicPr>
             <a:picLocks noChangeAspect="1"/>
           </p:cNvPicPr>
           <p:nvPr/>
         </p:nvPicPr>
         <p:blipFill>
-          <a:blip r:embed="rId1"/>
+          <a:blip r:embed="rId3"/>
           <a:stretch>
             <a:fillRect/>
           </a:stretch>
@@ -10520,7 +10436,7 @@
           <a:bodyPr wrap="square" lIns="0" tIns="0" rIns="0" bIns="0" rtlCol="0" anchor="t"/>
           <a:lstStyle/>
           <a:p>
-            <a:pPr indent="0" marL="0">
+            <a:pPr marL="0" indent="0">
               <a:buNone/>
             </a:pPr>
             <a:r>
@@ -10556,7 +10472,7 @@
           <a:bodyPr wrap="square" lIns="0" tIns="0" rIns="0" bIns="0" rtlCol="0" anchor="t"/>
           <a:lstStyle/>
           <a:p>
-            <a:pPr indent="0" marL="0">
+            <a:pPr marL="0" indent="0">
               <a:buNone/>
             </a:pPr>
             <a:r>
@@ -10592,7 +10508,7 @@
           <a:bodyPr wrap="square" lIns="0" tIns="0" rIns="0" bIns="0" rtlCol="0" anchor="t"/>
           <a:lstStyle/>
           <a:p>
-            <a:pPr algn="ctr" indent="0" marL="0">
+            <a:pPr marL="0" indent="0" algn="ctr">
               <a:buNone/>
             </a:pPr>
             <a:r>
@@ -10661,14 +10577,14 @@
       </p:sp>
       <p:pic>
         <p:nvPicPr>
-          <p:cNvPr id="11" name="Data warehouse ícono" descr="preencoded.png">    </p:cNvPr>
+          <p:cNvPr id="11" name="Data warehouse ícono" descr="preencoded.png"/>
           <p:cNvPicPr>
             <a:picLocks noChangeAspect="1"/>
           </p:cNvPicPr>
           <p:nvPr/>
         </p:nvPicPr>
         <p:blipFill>
-          <a:blip r:embed="rId2"/>
+          <a:blip r:embed="rId4"/>
           <a:stretch>
             <a:fillRect/>
           </a:stretch>
@@ -10704,7 +10620,7 @@
           <a:bodyPr wrap="square" lIns="0" tIns="0" rIns="0" bIns="0" rtlCol="0" anchor="t"/>
           <a:lstStyle/>
           <a:p>
-            <a:pPr indent="0" marL="0">
+            <a:pPr marL="0" indent="0">
               <a:buNone/>
             </a:pPr>
             <a:r>
@@ -10740,7 +10656,7 @@
           <a:bodyPr wrap="square" lIns="0" tIns="0" rIns="0" bIns="0" rtlCol="0" anchor="t"/>
           <a:lstStyle/>
           <a:p>
-            <a:pPr indent="0" marL="0">
+            <a:pPr marL="0" indent="0">
               <a:buNone/>
             </a:pPr>
             <a:r>
@@ -10776,7 +10692,7 @@
           <a:bodyPr wrap="square" lIns="0" tIns="0" rIns="0" bIns="0" rtlCol="0" anchor="t"/>
           <a:lstStyle/>
           <a:p>
-            <a:pPr algn="ctr" indent="0" marL="0">
+            <a:pPr marL="0" indent="0" algn="ctr">
               <a:buNone/>
             </a:pPr>
             <a:r>
@@ -10845,14 +10761,14 @@
       </p:sp>
       <p:pic>
         <p:nvPicPr>
-          <p:cNvPr id="17" name="Lakehouse ícono" descr="preencoded.png">    </p:cNvPr>
+          <p:cNvPr id="17" name="Lakehouse ícono" descr="preencoded.png"/>
           <p:cNvPicPr>
             <a:picLocks noChangeAspect="1"/>
           </p:cNvPicPr>
           <p:nvPr/>
         </p:nvPicPr>
         <p:blipFill>
-          <a:blip r:embed="rId3"/>
+          <a:blip r:embed="rId5"/>
           <a:stretch>
             <a:fillRect/>
           </a:stretch>
@@ -10888,7 +10804,7 @@
           <a:bodyPr wrap="square" lIns="0" tIns="0" rIns="0" bIns="0" rtlCol="0" anchor="t"/>
           <a:lstStyle/>
           <a:p>
-            <a:pPr indent="0" marL="0">
+            <a:pPr marL="0" indent="0">
               <a:buNone/>
             </a:pPr>
             <a:r>
@@ -10924,7 +10840,7 @@
           <a:bodyPr wrap="square" lIns="0" tIns="0" rIns="0" bIns="0" rtlCol="0" anchor="t"/>
           <a:lstStyle/>
           <a:p>
-            <a:pPr indent="0" marL="0">
+            <a:pPr marL="0" indent="0">
               <a:buNone/>
             </a:pPr>
             <a:r>
@@ -10959,7 +10875,7 @@
           </a:prstGeom>
           <a:extLst>
             <a:ext uri="{C572A759-6A51-4108-AA02-DFA0A04FC94B}">
-              <ma14:wrappingTextBoxFlag xmlns:ma14="http://schemas.microsoft.com/office/mac/drawingml/2011/main" val="0"/>
+              <ma14:wrappingTextBoxFlag xmlns:ma14="http://schemas.microsoft.com/office/mac/drawingml/2011/main" xmlns="" val="0"/>
             </a:ext>
           </a:extLst>
         </p:spPr>
@@ -10977,7 +10893,7 @@
           <a:p>
             <a:pPr algn="r"/>
             <a:fld id="{F7021451-1387-4CA6-816F-3879F97B5CBC}" type="slidenum">
-              <a:rPr b="0" lang="en-US"/>
+              <a:rPr lang="en-US" b="0"/>
               <a:t>8</a:t>
             </a:fld>
             <a:endParaRPr lang="en-US"/>
@@ -10989,6 +10905,13 @@
   <p:clrMapOvr>
     <a:masterClrMapping/>
   </p:clrMapOvr>
+  <p:timing>
+    <p:tnLst>
+      <p:par>
+        <p:cTn id="1" dur="indefinite" restart="never" nodeType="tmRoot"/>
+      </p:par>
+    </p:tnLst>
+  </p:timing>
 </p:sld>
 </file>
 
@@ -11012,9 +10935,11 @@
       <p:sp>
         <p:nvSpPr>
           <p:cNvPr id="2" name="Text 1"/>
-          <p:cNvSpPr/>
+          <p:cNvSpPr>
+            <a:spLocks noGrp="1"/>
+          </p:cNvSpPr>
           <p:nvPr>
-            <p:ph idx="101" type="title" hasCustomPrompt="1"/>
+            <p:ph type="title" idx="101" hasCustomPrompt="1"/>
           </p:nvPr>
         </p:nvSpPr>
         <p:spPr>
@@ -11032,7 +10957,7 @@
           <a:bodyPr wrap="square" lIns="0" tIns="0" rIns="0" bIns="0" rtlCol="0" anchor="t"/>
           <a:lstStyle/>
           <a:p>
-            <a:pPr algn="l" indent="0" marL="0">
+            <a:pPr marL="0" indent="0" algn="l">
               <a:buNone/>
             </a:pPr>
             <a:r>
@@ -11095,7 +11020,7 @@
           <a:bodyPr wrap="square" lIns="0" tIns="0" rIns="0" bIns="0" rtlCol="0" anchor="t"/>
           <a:lstStyle/>
           <a:p>
-            <a:pPr indent="0" marL="0">
+            <a:pPr marL="0" indent="0">
               <a:buNone/>
             </a:pPr>
             <a:r>
@@ -11134,7 +11059,7 @@
           <a:bodyPr wrap="square" lIns="0" tIns="0" rIns="0" bIns="0" rtlCol="0" anchor="t"/>
           <a:lstStyle/>
           <a:p>
-            <a:pPr indent="0" marL="0">
+            <a:pPr marL="0" indent="0">
               <a:buNone/>
             </a:pPr>
             <a:r>
@@ -11173,7 +11098,7 @@
           <a:bodyPr wrap="square" lIns="0" tIns="0" rIns="0" bIns="0" rtlCol="0" anchor="t"/>
           <a:lstStyle/>
           <a:p>
-            <a:pPr indent="0" marL="0">
+            <a:pPr marL="0" indent="0">
               <a:buNone/>
             </a:pPr>
             <a:r>
@@ -11212,7 +11137,7 @@
           <a:bodyPr wrap="square" lIns="0" tIns="0" rIns="0" bIns="0" rtlCol="0" anchor="t"/>
           <a:lstStyle/>
           <a:p>
-            <a:pPr indent="0" marL="0">
+            <a:pPr marL="0" indent="0">
               <a:buNone/>
             </a:pPr>
             <a:r>
@@ -11251,7 +11176,7 @@
           <a:bodyPr wrap="square" lIns="0" tIns="0" rIns="0" bIns="0" rtlCol="0" anchor="t"/>
           <a:lstStyle/>
           <a:p>
-            <a:pPr indent="0" marL="0">
+            <a:pPr marL="0" indent="0">
               <a:buNone/>
             </a:pPr>
             <a:r>
@@ -11290,7 +11215,7 @@
           <a:bodyPr wrap="square" lIns="0" tIns="0" rIns="0" bIns="0" rtlCol="0" anchor="t"/>
           <a:lstStyle/>
           <a:p>
-            <a:pPr indent="0" marL="0">
+            <a:pPr marL="0" indent="0">
               <a:buNone/>
             </a:pPr>
             <a:r>
@@ -11329,7 +11254,7 @@
           <a:bodyPr wrap="square" lIns="0" tIns="0" rIns="0" bIns="0" rtlCol="0" anchor="t"/>
           <a:lstStyle/>
           <a:p>
-            <a:pPr indent="0" marL="0">
+            <a:pPr marL="0" indent="0">
               <a:buNone/>
             </a:pPr>
             <a:r>
@@ -11374,14 +11299,14 @@
       </p:sp>
       <p:pic>
         <p:nvPicPr>
-          <p:cNvPr id="12" name="Archivos Parquet ícono" descr="preencoded.png">    </p:cNvPr>
+          <p:cNvPr id="12" name="Archivos Parquet ícono" descr="preencoded.png"/>
           <p:cNvPicPr>
             <a:picLocks noChangeAspect="1"/>
           </p:cNvPicPr>
           <p:nvPr/>
         </p:nvPicPr>
         <p:blipFill>
-          <a:blip r:embed="rId1"/>
+          <a:blip r:embed="rId3"/>
           <a:stretch>
             <a:fillRect/>
           </a:stretch>
@@ -11417,7 +11342,7 @@
           <a:bodyPr wrap="square" lIns="0" tIns="0" rIns="0" bIns="0" rtlCol="0" anchor="t"/>
           <a:lstStyle/>
           <a:p>
-            <a:pPr indent="0" marL="0">
+            <a:pPr marL="0" indent="0">
               <a:buNone/>
             </a:pPr>
             <a:r>
@@ -11453,7 +11378,7 @@
           <a:bodyPr wrap="square" lIns="0" tIns="0" rIns="0" bIns="0" rtlCol="0" anchor="t"/>
           <a:lstStyle/>
           <a:p>
-            <a:pPr indent="0" marL="0">
+            <a:pPr marL="0" indent="0">
               <a:buNone/>
             </a:pPr>
             <a:r>
@@ -11495,14 +11420,14 @@
       </p:sp>
       <p:pic>
         <p:nvPicPr>
-          <p:cNvPr id="16" name="_delta_log ícono" descr="preencoded.png">    </p:cNvPr>
+          <p:cNvPr id="16" name="_delta_log ícono" descr="preencoded.png"/>
           <p:cNvPicPr>
             <a:picLocks noChangeAspect="1"/>
           </p:cNvPicPr>
           <p:nvPr/>
         </p:nvPicPr>
         <p:blipFill>
-          <a:blip r:embed="rId2"/>
+          <a:blip r:embed="rId4"/>
           <a:stretch>
             <a:fillRect/>
           </a:stretch>
@@ -11538,7 +11463,7 @@
           <a:bodyPr wrap="square" lIns="0" tIns="0" rIns="0" bIns="0" rtlCol="0" anchor="t"/>
           <a:lstStyle/>
           <a:p>
-            <a:pPr indent="0" marL="0">
+            <a:pPr marL="0" indent="0">
               <a:buNone/>
             </a:pPr>
             <a:r>
@@ -11574,7 +11499,7 @@
           <a:bodyPr wrap="square" lIns="0" tIns="0" rIns="0" bIns="0" rtlCol="0" anchor="t"/>
           <a:lstStyle/>
           <a:p>
-            <a:pPr indent="0" marL="0">
+            <a:pPr marL="0" indent="0">
               <a:buNone/>
             </a:pPr>
             <a:r>
@@ -11616,14 +11541,14 @@
       </p:sp>
       <p:pic>
         <p:nvPicPr>
-          <p:cNvPr id="20" name="Checkpoint ícono" descr="preencoded.png">    </p:cNvPr>
+          <p:cNvPr id="20" name="Checkpoint ícono" descr="preencoded.png"/>
           <p:cNvPicPr>
             <a:picLocks noChangeAspect="1"/>
           </p:cNvPicPr>
           <p:nvPr/>
         </p:nvPicPr>
         <p:blipFill>
-          <a:blip r:embed="rId3"/>
+          <a:blip r:embed="rId5"/>
           <a:stretch>
             <a:fillRect/>
           </a:stretch>
@@ -11659,7 +11584,7 @@
           <a:bodyPr wrap="square" lIns="0" tIns="0" rIns="0" bIns="0" rtlCol="0" anchor="t"/>
           <a:lstStyle/>
           <a:p>
-            <a:pPr indent="0" marL="0">
+            <a:pPr marL="0" indent="0">
               <a:buNone/>
             </a:pPr>
             <a:r>
@@ -11695,7 +11620,7 @@
           <a:bodyPr wrap="square" lIns="0" tIns="0" rIns="0" bIns="0" rtlCol="0" anchor="t"/>
           <a:lstStyle/>
           <a:p>
-            <a:pPr indent="0" marL="0">
+            <a:pPr marL="0" indent="0">
               <a:buNone/>
             </a:pPr>
             <a:r>
@@ -11730,7 +11655,7 @@
           </a:prstGeom>
           <a:extLst>
             <a:ext uri="{C572A759-6A51-4108-AA02-DFA0A04FC94B}">
-              <ma14:wrappingTextBoxFlag xmlns:ma14="http://schemas.microsoft.com/office/mac/drawingml/2011/main" val="0"/>
+              <ma14:wrappingTextBoxFlag xmlns:ma14="http://schemas.microsoft.com/office/mac/drawingml/2011/main" xmlns="" val="0"/>
             </a:ext>
           </a:extLst>
         </p:spPr>
@@ -11748,7 +11673,7 @@
           <a:p>
             <a:pPr algn="r"/>
             <a:fld id="{F7021451-1387-4CA6-816F-3879F97B5CBC}" type="slidenum">
-              <a:rPr b="0" lang="en-US"/>
+              <a:rPr lang="en-US" b="0"/>
               <a:t>9</a:t>
             </a:fld>
             <a:endParaRPr lang="en-US"/>
@@ -11760,6 +11685,13 @@
   <p:clrMapOvr>
     <a:masterClrMapping/>
   </p:clrMapOvr>
+  <p:timing>
+    <p:tnLst>
+      <p:par>
+        <p:cTn id="1" dur="indefinite" restart="never" nodeType="tmRoot"/>
+      </p:par>
+    </p:tnLst>
+  </p:timing>
 </p:sld>
 </file>
 
@@ -12056,4 +11988,265 @@
     </a:ext>
   </a:extLst>
 </a:theme>
+</file>
+
+<file path=ppt/theme/theme2.xml><?xml version="1.0" encoding="utf-8"?>
+<a:theme xmlns:a="http://schemas.openxmlformats.org/drawingml/2006/main" name="Tema de Office">
+  <a:themeElements>
+    <a:clrScheme name="Office">
+      <a:dk1>
+        <a:sysClr val="windowText" lastClr="000000"/>
+      </a:dk1>
+      <a:lt1>
+        <a:sysClr val="window" lastClr="FFFFFF"/>
+      </a:lt1>
+      <a:dk2>
+        <a:srgbClr val="44546A"/>
+      </a:dk2>
+      <a:lt2>
+        <a:srgbClr val="E7E6E6"/>
+      </a:lt2>
+      <a:accent1>
+        <a:srgbClr val="5B9BD5"/>
+      </a:accent1>
+      <a:accent2>
+        <a:srgbClr val="ED7D31"/>
+      </a:accent2>
+      <a:accent3>
+        <a:srgbClr val="A5A5A5"/>
+      </a:accent3>
+      <a:accent4>
+        <a:srgbClr val="FFC000"/>
+      </a:accent4>
+      <a:accent5>
+        <a:srgbClr val="4472C4"/>
+      </a:accent5>
+      <a:accent6>
+        <a:srgbClr val="70AD47"/>
+      </a:accent6>
+      <a:hlink>
+        <a:srgbClr val="0563C1"/>
+      </a:hlink>
+      <a:folHlink>
+        <a:srgbClr val="954F72"/>
+      </a:folHlink>
+    </a:clrScheme>
+    <a:fontScheme name="Office">
+      <a:majorFont>
+        <a:latin typeface="Calibri Light" panose="020F0302020204030204"/>
+        <a:ea typeface=""/>
+        <a:cs typeface=""/>
+        <a:font script="Jpan" typeface="ＭＳ Ｐゴシック"/>
+        <a:font script="Hang" typeface="맑은 고딕"/>
+        <a:font script="Hans" typeface="宋体"/>
+        <a:font script="Hant" typeface="新細明體"/>
+        <a:font script="Arab" typeface="Times New Roman"/>
+        <a:font script="Hebr" typeface="Times New Roman"/>
+        <a:font script="Thai" typeface="Angsana New"/>
+        <a:font script="Ethi" typeface="Nyala"/>
+        <a:font script="Beng" typeface="Vrinda"/>
+        <a:font script="Gujr" typeface="Shruti"/>
+        <a:font script="Khmr" typeface="MoolBoran"/>
+        <a:font script="Knda" typeface="Tunga"/>
+        <a:font script="Guru" typeface="Raavi"/>
+        <a:font script="Cans" typeface="Euphemia"/>
+        <a:font script="Cher" typeface="Plantagenet Cherokee"/>
+        <a:font script="Yiii" typeface="Microsoft Yi Baiti"/>
+        <a:font script="Tibt" typeface="Microsoft Himalaya"/>
+        <a:font script="Thaa" typeface="MV Boli"/>
+        <a:font script="Deva" typeface="Mangal"/>
+        <a:font script="Telu" typeface="Gautami"/>
+        <a:font script="Taml" typeface="Latha"/>
+        <a:font script="Syrc" typeface="Estrangelo Edessa"/>
+        <a:font script="Orya" typeface="Kalinga"/>
+        <a:font script="Mlym" typeface="Kartika"/>
+        <a:font script="Laoo" typeface="DokChampa"/>
+        <a:font script="Sinh" typeface="Iskoola Pota"/>
+        <a:font script="Mong" typeface="Mongolian Baiti"/>
+        <a:font script="Viet" typeface="Times New Roman"/>
+        <a:font script="Uigh" typeface="Microsoft Uighur"/>
+        <a:font script="Geor" typeface="Sylfaen"/>
+      </a:majorFont>
+      <a:minorFont>
+        <a:latin typeface="Calibri" panose="020F0502020204030204"/>
+        <a:ea typeface=""/>
+        <a:cs typeface=""/>
+        <a:font script="Jpan" typeface="ＭＳ Ｐゴシック"/>
+        <a:font script="Hang" typeface="맑은 고딕"/>
+        <a:font script="Hans" typeface="宋体"/>
+        <a:font script="Hant" typeface="新細明體"/>
+        <a:font script="Arab" typeface="Arial"/>
+        <a:font script="Hebr" typeface="Arial"/>
+        <a:font script="Thai" typeface="Cordia New"/>
+        <a:font script="Ethi" typeface="Nyala"/>
+        <a:font script="Beng" typeface="Vrinda"/>
+        <a:font script="Gujr" typeface="Shruti"/>
+        <a:font script="Khmr" typeface="DaunPenh"/>
+        <a:font script="Knda" typeface="Tunga"/>
+        <a:font script="Guru" typeface="Raavi"/>
+        <a:font script="Cans" typeface="Euphemia"/>
+        <a:font script="Cher" typeface="Plantagenet Cherokee"/>
+        <a:font script="Yiii" typeface="Microsoft Yi Baiti"/>
+        <a:font script="Tibt" typeface="Microsoft Himalaya"/>
+        <a:font script="Thaa" typeface="MV Boli"/>
+        <a:font script="Deva" typeface="Mangal"/>
+        <a:font script="Telu" typeface="Gautami"/>
+        <a:font script="Taml" typeface="Latha"/>
+        <a:font script="Syrc" typeface="Estrangelo Edessa"/>
+        <a:font script="Orya" typeface="Kalinga"/>
+        <a:font script="Mlym" typeface="Kartika"/>
+        <a:font script="Laoo" typeface="DokChampa"/>
+        <a:font script="Sinh" typeface="Iskoola Pota"/>
+        <a:font script="Mong" typeface="Mongolian Baiti"/>
+        <a:font script="Viet" typeface="Arial"/>
+        <a:font script="Uigh" typeface="Microsoft Uighur"/>
+        <a:font script="Geor" typeface="Sylfaen"/>
+      </a:minorFont>
+    </a:fontScheme>
+    <a:fmtScheme name="Office">
+      <a:fillStyleLst>
+        <a:solidFill>
+          <a:schemeClr val="phClr"/>
+        </a:solidFill>
+        <a:gradFill rotWithShape="1">
+          <a:gsLst>
+            <a:gs pos="0">
+              <a:schemeClr val="phClr">
+                <a:lumMod val="110000"/>
+                <a:satMod val="105000"/>
+                <a:tint val="67000"/>
+              </a:schemeClr>
+            </a:gs>
+            <a:gs pos="50000">
+              <a:schemeClr val="phClr">
+                <a:lumMod val="105000"/>
+                <a:satMod val="103000"/>
+                <a:tint val="73000"/>
+              </a:schemeClr>
+            </a:gs>
+            <a:gs pos="100000">
+              <a:schemeClr val="phClr">
+                <a:lumMod val="105000"/>
+                <a:satMod val="109000"/>
+                <a:tint val="81000"/>
+              </a:schemeClr>
+            </a:gs>
+          </a:gsLst>
+          <a:lin ang="5400000" scaled="0"/>
+        </a:gradFill>
+        <a:gradFill rotWithShape="1">
+          <a:gsLst>
+            <a:gs pos="0">
+              <a:schemeClr val="phClr">
+                <a:satMod val="103000"/>
+                <a:lumMod val="102000"/>
+                <a:tint val="94000"/>
+              </a:schemeClr>
+            </a:gs>
+            <a:gs pos="50000">
+              <a:schemeClr val="phClr">
+                <a:satMod val="110000"/>
+                <a:lumMod val="100000"/>
+                <a:shade val="100000"/>
+              </a:schemeClr>
+            </a:gs>
+            <a:gs pos="100000">
+              <a:schemeClr val="phClr">
+                <a:lumMod val="99000"/>
+                <a:satMod val="120000"/>
+                <a:shade val="78000"/>
+              </a:schemeClr>
+            </a:gs>
+          </a:gsLst>
+          <a:lin ang="5400000" scaled="0"/>
+        </a:gradFill>
+      </a:fillStyleLst>
+      <a:lnStyleLst>
+        <a:ln w="6350" cap="flat" cmpd="sng" algn="ctr">
+          <a:solidFill>
+            <a:schemeClr val="phClr"/>
+          </a:solidFill>
+          <a:prstDash val="solid"/>
+          <a:miter lim="800000"/>
+        </a:ln>
+        <a:ln w="12700" cap="flat" cmpd="sng" algn="ctr">
+          <a:solidFill>
+            <a:schemeClr val="phClr"/>
+          </a:solidFill>
+          <a:prstDash val="solid"/>
+          <a:miter lim="800000"/>
+        </a:ln>
+        <a:ln w="19050" cap="flat" cmpd="sng" algn="ctr">
+          <a:solidFill>
+            <a:schemeClr val="phClr"/>
+          </a:solidFill>
+          <a:prstDash val="solid"/>
+          <a:miter lim="800000"/>
+        </a:ln>
+      </a:lnStyleLst>
+      <a:effectStyleLst>
+        <a:effectStyle>
+          <a:effectLst/>
+        </a:effectStyle>
+        <a:effectStyle>
+          <a:effectLst/>
+        </a:effectStyle>
+        <a:effectStyle>
+          <a:effectLst>
+            <a:outerShdw blurRad="57150" dist="19050" dir="5400000" algn="ctr" rotWithShape="0">
+              <a:srgbClr val="000000">
+                <a:alpha val="63000"/>
+              </a:srgbClr>
+            </a:outerShdw>
+          </a:effectLst>
+        </a:effectStyle>
+      </a:effectStyleLst>
+      <a:bgFillStyleLst>
+        <a:solidFill>
+          <a:schemeClr val="phClr"/>
+        </a:solidFill>
+        <a:solidFill>
+          <a:schemeClr val="phClr">
+            <a:tint val="95000"/>
+            <a:satMod val="170000"/>
+          </a:schemeClr>
+        </a:solidFill>
+        <a:gradFill rotWithShape="1">
+          <a:gsLst>
+            <a:gs pos="0">
+              <a:schemeClr val="phClr">
+                <a:tint val="93000"/>
+                <a:satMod val="150000"/>
+                <a:shade val="98000"/>
+                <a:lumMod val="102000"/>
+              </a:schemeClr>
+            </a:gs>
+            <a:gs pos="50000">
+              <a:schemeClr val="phClr">
+                <a:tint val="98000"/>
+                <a:satMod val="130000"/>
+                <a:shade val="90000"/>
+                <a:lumMod val="103000"/>
+              </a:schemeClr>
+            </a:gs>
+            <a:gs pos="100000">
+              <a:schemeClr val="phClr">
+                <a:shade val="63000"/>
+                <a:satMod val="120000"/>
+              </a:schemeClr>
+            </a:gs>
+          </a:gsLst>
+          <a:lin ang="5400000" scaled="0"/>
+        </a:gradFill>
+      </a:bgFillStyleLst>
+    </a:fmtScheme>
+  </a:themeElements>
+  <a:objectDefaults/>
+  <a:extraClrSchemeLst/>
+  <a:extLst>
+    <a:ext uri="{05A4C25C-085E-4340-85A3-A5531E510DB2}">
+      <thm15:themeFamily xmlns:thm15="http://schemas.microsoft.com/office/thememl/2012/main" name="Office Theme" id="{62F939B6-93AF-4DB8-9C6B-D6C7DFDC589F}" vid="{4A3C46E8-61CC-4603-A589-7422A47A8E4A}"/>
+    </a:ext>
+  </a:extLst>
+</a:theme>
 </file>